--- a/Week6_Applied1/solution/FIT3143_Applied1_Slides.pptx
+++ b/Week6_Applied1/solution/FIT3143_Applied1_Slides.pptx
@@ -13,14 +13,9 @@
     <p:sldId id="261" r:id="rId7"/>
     <p:sldId id="262" r:id="rId8"/>
     <p:sldId id="263" r:id="rId9"/>
-    <p:sldId id="264" r:id="rId10"/>
-    <p:sldId id="265" r:id="rId11"/>
-    <p:sldId id="266" r:id="rId12"/>
-    <p:sldId id="267" r:id="rId13"/>
-    <p:sldId id="268" r:id="rId14"/>
   </p:sldIdLst>
   <p:notesMasterIdLst>
-    <p:notesMasterId r:id="rId15"/>
+    <p:notesMasterId r:id="rId10"/>
   </p:notesMasterIdLst>
   <p:sldSz cx="9144000" cy="5143500"/>
   <p:notesSz cx="5143500" cy="9144000"/>
@@ -556,358 +551,6 @@
 </p:notes>
 </file>
 
-<file path=ppt/notesSlides/notesSlide10.xml><?xml version="1.0" encoding="utf-8"?>
-<p:notes xmlns:a="http://schemas.openxmlformats.org/drawingml/2006/main" xmlns:r="http://schemas.openxmlformats.org/officeDocument/2006/relationships" xmlns:p="http://schemas.openxmlformats.org/presentationml/2006/main">
-  <p:cSld>
-    <p:spTree>
-      <p:nvGrpSpPr>
-        <p:cNvPr id="1" name=""/>
-        <p:cNvGrpSpPr/>
-        <p:nvPr/>
-      </p:nvGrpSpPr>
-      <p:grpSpPr>
-        <a:xfrm>
-          <a:off x="0" y="0"/>
-          <a:ext cx="0" cy="0"/>
-          <a:chOff x="0" y="0"/>
-          <a:chExt cx="0" cy="0"/>
-        </a:xfrm>
-      </p:grpSpPr>
-      <p:sp>
-        <p:nvSpPr>
-          <p:cNvPr id="2" name="Slide Image Placeholder 1"/>
-          <p:cNvSpPr>
-            <a:spLocks noGrp="1" noRot="1" noChangeAspect="1"/>
-          </p:cNvSpPr>
-          <p:nvPr>
-            <p:ph type="sldImg"/>
-          </p:nvPr>
-        </p:nvSpPr>
-        <p:spPr/>
-      </p:sp>
-      <p:sp>
-        <p:nvSpPr>
-          <p:cNvPr id="3" name="Notes Placeholder 2"/>
-          <p:cNvSpPr>
-            <a:spLocks noGrp="1"/>
-          </p:cNvSpPr>
-          <p:nvPr>
-            <p:ph type="body" idx="1"/>
-          </p:nvPr>
-        </p:nvSpPr>
-        <p:spPr/>
-        <p:txBody>
-          <a:bodyPr/>
-          <a:lstStyle/>
-          <a:p>
-            <a:r>
-              <a:rPr lang="en-US" dirty="0"/>
-              <a:t>Adding base stations divides that load: with b stations each handles about n over b nodes, so the worst case drops like this curve. But returns diminish, because the stations now have to synchronise a shared availability table to still find the true closest free node, and that synchronisation grows with the number of stations. It behaves like the serial fraction of the design.</a:t>
-            </a:r>
-            <a:endParaRPr lang="en-US" dirty="0"/>
-          </a:p>
-        </p:txBody>
-      </p:sp>
-      <p:sp>
-        <p:nvSpPr>
-          <p:cNvPr id="4" name="Slide Number Placeholder 3"/>
-          <p:cNvSpPr>
-            <a:spLocks noGrp="1"/>
-          </p:cNvSpPr>
-          <p:nvPr>
-            <p:ph type="sldNum" sz="quarter" idx="10"/>
-          </p:nvPr>
-        </p:nvSpPr>
-        <p:spPr/>
-        <p:txBody>
-          <a:bodyPr/>
-          <a:lstStyle/>
-          <a:p>
-            <a:fld id="{F7021451-1387-4CA6-816F-3879F97B5CBC}" type="slidenum">
-              <a:rPr lang="en-US"/>
-              <a:t>10</a:t>
-            </a:fld>
-            <a:endParaRPr lang="en-US"/>
-          </a:p>
-        </p:txBody>
-      </p:sp>
-    </p:spTree>
-    <p:extLst>
-      <p:ext uri="{BB962C8B-B14F-4D97-AF65-F5344CB8AC3E}">
-        <p14:creationId xmlns:p14="http://schemas.microsoft.com/office/powerpoint/2010/main" val="1024086991"/>
-      </p:ext>
-    </p:extLst>
-  </p:cSld>
-  <p:clrMapOvr>
-    <a:masterClrMapping/>
-  </p:clrMapOvr>
-</p:notes>
-</file>
-
-<file path=ppt/notesSlides/notesSlide11.xml><?xml version="1.0" encoding="utf-8"?>
-<p:notes xmlns:a="http://schemas.openxmlformats.org/drawingml/2006/main" xmlns:r="http://schemas.openxmlformats.org/officeDocument/2006/relationships" xmlns:p="http://schemas.openxmlformats.org/presentationml/2006/main">
-  <p:cSld>
-    <p:spTree>
-      <p:nvGrpSpPr>
-        <p:cNvPr id="1" name=""/>
-        <p:cNvGrpSpPr/>
-        <p:nvPr/>
-      </p:nvGrpSpPr>
-      <p:grpSpPr>
-        <a:xfrm>
-          <a:off x="0" y="0"/>
-          <a:ext cx="0" cy="0"/>
-          <a:chOff x="0" y="0"/>
-          <a:chExt cx="0" cy="0"/>
-        </a:xfrm>
-      </p:grpSpPr>
-      <p:sp>
-        <p:nvSpPr>
-          <p:cNvPr id="2" name="Slide Image Placeholder 1"/>
-          <p:cNvSpPr>
-            <a:spLocks noGrp="1" noRot="1" noChangeAspect="1"/>
-          </p:cNvSpPr>
-          <p:nvPr>
-            <p:ph type="sldImg"/>
-          </p:nvPr>
-        </p:nvSpPr>
-        <p:spPr/>
-      </p:sp>
-      <p:sp>
-        <p:nvSpPr>
-          <p:cNvPr id="3" name="Notes Placeholder 2"/>
-          <p:cNvSpPr>
-            <a:spLocks noGrp="1"/>
-          </p:cNvSpPr>
-          <p:nvPr>
-            <p:ph type="body" idx="1"/>
-          </p:nvPr>
-        </p:nvSpPr>
-        <p:spPr/>
-        <p:txBody>
-          <a:bodyPr/>
-          <a:lstStyle/>
-          <a:p>
-            <a:r>
-              <a:rPr lang="en-US" dirty="0"/>
-              <a:t>To conclude: a 2-D mesh with a star overlay matches the physical WSN, our MPI architecture combines message passing between machines with threads inside each node, and the analysis shows the base station link is the bottleneck, relieved but not removed by adding stations. Limitations: MPI's reliable delivery is optimistic for real wireless, and the base station is a single point of failure. Future work: fault injection and replicated base stations. Thank you, happy to take questions.</a:t>
-            </a:r>
-            <a:endParaRPr lang="en-US" dirty="0"/>
-          </a:p>
-        </p:txBody>
-      </p:sp>
-      <p:sp>
-        <p:nvSpPr>
-          <p:cNvPr id="4" name="Slide Number Placeholder 3"/>
-          <p:cNvSpPr>
-            <a:spLocks noGrp="1"/>
-          </p:cNvSpPr>
-          <p:nvPr>
-            <p:ph type="sldNum" sz="quarter" idx="10"/>
-          </p:nvPr>
-        </p:nvSpPr>
-        <p:spPr/>
-        <p:txBody>
-          <a:bodyPr/>
-          <a:lstStyle/>
-          <a:p>
-            <a:fld id="{F7021451-1387-4CA6-816F-3879F97B5CBC}" type="slidenum">
-              <a:rPr lang="en-US"/>
-              <a:t>11</a:t>
-            </a:fld>
-            <a:endParaRPr lang="en-US"/>
-          </a:p>
-        </p:txBody>
-      </p:sp>
-    </p:spTree>
-    <p:extLst>
-      <p:ext uri="{BB962C8B-B14F-4D97-AF65-F5344CB8AC3E}">
-        <p14:creationId xmlns:p14="http://schemas.microsoft.com/office/powerpoint/2010/main" val="1024086991"/>
-      </p:ext>
-    </p:extLst>
-  </p:cSld>
-  <p:clrMapOvr>
-    <a:masterClrMapping/>
-  </p:clrMapOvr>
-</p:notes>
-</file>
-
-<file path=ppt/notesSlides/notesSlide12.xml><?xml version="1.0" encoding="utf-8"?>
-<p:notes xmlns:a="http://schemas.openxmlformats.org/drawingml/2006/main" xmlns:r="http://schemas.openxmlformats.org/officeDocument/2006/relationships" xmlns:p="http://schemas.openxmlformats.org/presentationml/2006/main">
-  <p:cSld>
-    <p:spTree>
-      <p:nvGrpSpPr>
-        <p:cNvPr id="1" name=""/>
-        <p:cNvGrpSpPr/>
-        <p:nvPr/>
-      </p:nvGrpSpPr>
-      <p:grpSpPr>
-        <a:xfrm>
-          <a:off x="0" y="0"/>
-          <a:ext cx="0" cy="0"/>
-          <a:chOff x="0" y="0"/>
-          <a:chExt cx="0" cy="0"/>
-        </a:xfrm>
-      </p:grpSpPr>
-      <p:sp>
-        <p:nvSpPr>
-          <p:cNvPr id="2" name="Slide Image Placeholder 1"/>
-          <p:cNvSpPr>
-            <a:spLocks noGrp="1" noRot="1" noChangeAspect="1"/>
-          </p:cNvSpPr>
-          <p:nvPr>
-            <p:ph type="sldImg"/>
-          </p:nvPr>
-        </p:nvSpPr>
-        <p:spPr/>
-      </p:sp>
-      <p:sp>
-        <p:nvSpPr>
-          <p:cNvPr id="3" name="Notes Placeholder 2"/>
-          <p:cNvSpPr>
-            <a:spLocks noGrp="1"/>
-          </p:cNvSpPr>
-          <p:nvPr>
-            <p:ph type="body" idx="1"/>
-          </p:nvPr>
-        </p:nvSpPr>
-        <p:spPr/>
-        <p:txBody>
-          <a:bodyPr/>
-          <a:lstStyle/>
-          <a:p>
-            <a:r>
-              <a:rPr lang="en-US" dirty="0"/>
-              <a:t>Q and A period: about one minute each, answered individually, no AI tools. Erwyna covers topology and structure questions, Taabish covers message passing and delay analysis questions. Appendix slides after this one are labelled APPENDIX so markers do not confuse them with assessed sections.</a:t>
-            </a:r>
-            <a:endParaRPr lang="en-US" dirty="0"/>
-          </a:p>
-        </p:txBody>
-      </p:sp>
-      <p:sp>
-        <p:nvSpPr>
-          <p:cNvPr id="4" name="Slide Number Placeholder 3"/>
-          <p:cNvSpPr>
-            <a:spLocks noGrp="1"/>
-          </p:cNvSpPr>
-          <p:nvPr>
-            <p:ph type="sldNum" sz="quarter" idx="10"/>
-          </p:nvPr>
-        </p:nvSpPr>
-        <p:spPr/>
-        <p:txBody>
-          <a:bodyPr/>
-          <a:lstStyle/>
-          <a:p>
-            <a:fld id="{F7021451-1387-4CA6-816F-3879F97B5CBC}" type="slidenum">
-              <a:rPr lang="en-US"/>
-              <a:t>12</a:t>
-            </a:fld>
-            <a:endParaRPr lang="en-US"/>
-          </a:p>
-        </p:txBody>
-      </p:sp>
-    </p:spTree>
-    <p:extLst>
-      <p:ext uri="{BB962C8B-B14F-4D97-AF65-F5344CB8AC3E}">
-        <p14:creationId xmlns:p14="http://schemas.microsoft.com/office/powerpoint/2010/main" val="1024086991"/>
-      </p:ext>
-    </p:extLst>
-  </p:cSld>
-  <p:clrMapOvr>
-    <a:masterClrMapping/>
-  </p:clrMapOvr>
-</p:notes>
-</file>
-
-<file path=ppt/notesSlides/notesSlide13.xml><?xml version="1.0" encoding="utf-8"?>
-<p:notes xmlns:a="http://schemas.openxmlformats.org/drawingml/2006/main" xmlns:r="http://schemas.openxmlformats.org/officeDocument/2006/relationships" xmlns:p="http://schemas.openxmlformats.org/presentationml/2006/main">
-  <p:cSld>
-    <p:spTree>
-      <p:nvGrpSpPr>
-        <p:cNvPr id="1" name=""/>
-        <p:cNvGrpSpPr/>
-        <p:nvPr/>
-      </p:nvGrpSpPr>
-      <p:grpSpPr>
-        <a:xfrm>
-          <a:off x="0" y="0"/>
-          <a:ext cx="0" cy="0"/>
-          <a:chOff x="0" y="0"/>
-          <a:chExt cx="0" cy="0"/>
-        </a:xfrm>
-      </p:grpSpPr>
-      <p:sp>
-        <p:nvSpPr>
-          <p:cNvPr id="2" name="Slide Image Placeholder 1"/>
-          <p:cNvSpPr>
-            <a:spLocks noGrp="1" noRot="1" noChangeAspect="1"/>
-          </p:cNvSpPr>
-          <p:nvPr>
-            <p:ph type="sldImg"/>
-          </p:nvPr>
-        </p:nvSpPr>
-        <p:spPr/>
-      </p:sp>
-      <p:sp>
-        <p:nvSpPr>
-          <p:cNvPr id="3" name="Notes Placeholder 2"/>
-          <p:cNvSpPr>
-            <a:spLocks noGrp="1"/>
-          </p:cNvSpPr>
-          <p:nvPr>
-            <p:ph type="body" idx="1"/>
-          </p:nvPr>
-        </p:nvSpPr>
-        <p:spPr/>
-        <p:txBody>
-          <a:bodyPr/>
-          <a:lstStyle/>
-          <a:p>
-            <a:r>
-              <a:rPr lang="en-US" dirty="0"/>
-              <a:t>Not presented: duplicate this divider's style for any extra slides (full delay arithmetic, extra graphs, code snippets) so markers can tell them apart from the assessed sections.</a:t>
-            </a:r>
-            <a:endParaRPr lang="en-US" dirty="0"/>
-          </a:p>
-        </p:txBody>
-      </p:sp>
-      <p:sp>
-        <p:nvSpPr>
-          <p:cNvPr id="4" name="Slide Number Placeholder 3"/>
-          <p:cNvSpPr>
-            <a:spLocks noGrp="1"/>
-          </p:cNvSpPr>
-          <p:nvPr>
-            <p:ph type="sldNum" sz="quarter" idx="10"/>
-          </p:nvPr>
-        </p:nvSpPr>
-        <p:spPr/>
-        <p:txBody>
-          <a:bodyPr/>
-          <a:lstStyle/>
-          <a:p>
-            <a:fld id="{F7021451-1387-4CA6-816F-3879F97B5CBC}" type="slidenum">
-              <a:rPr lang="en-US"/>
-              <a:t>13</a:t>
-            </a:fld>
-            <a:endParaRPr lang="en-US"/>
-          </a:p>
-        </p:txBody>
-      </p:sp>
-    </p:spTree>
-    <p:extLst>
-      <p:ext uri="{BB962C8B-B14F-4D97-AF65-F5344CB8AC3E}">
-        <p14:creationId xmlns:p14="http://schemas.microsoft.com/office/powerpoint/2010/main" val="1024086991"/>
-      </p:ext>
-    </p:extLst>
-  </p:cSld>
-  <p:clrMapOvr>
-    <a:masterClrMapping/>
-  </p:clrMapOvr>
-</p:notes>
-</file>
-
 <file path=ppt/notesSlides/notesSlide2.xml><?xml version="1.0" encoding="utf-8"?>
 <p:notes xmlns:a="http://schemas.openxmlformats.org/drawingml/2006/main" xmlns:r="http://schemas.openxmlformats.org/officeDocument/2006/relationships" xmlns:p="http://schemas.openxmlformats.org/presentationml/2006/main">
   <p:cSld>
@@ -1394,7 +1037,7 @@
           <a:p>
             <a:r>
               <a:rPr lang="en-US" dirty="0"/>
-              <a:t>Thanks Erwyna. Our design uses four message types, plus an optional heartbeat. When a node passes its threshold it sends neighbour queries with non-blocking MPI_Isend. That's deliberate: two adjacent nodes can cross their thresholds at the same time and query each other, and with blocking sends both could wait forever. Non-blocking calls let each node service incoming queries while waiting for its own replies. If every neighbour is also saturated, the node packs an alert struct with MPI_Type_create_struct and sends it to the base station, which logs it, runs a Manhattan-distance search for the closest free node, and replies with a redirect. You can see the full cycle in this communication diagram.</a:t>
+              <a:t>Q and A period: about one minute each, answered individually, no AI tools. Erwyna covers topology and structure questions, Taabish covers message passing and delay analysis questions. Appendix slides after this one are labelled APPENDIX so markers do not confuse them with assessed sections.</a:t>
             </a:r>
             <a:endParaRPr lang="en-US" dirty="0"/>
           </a:p>
@@ -1482,7 +1125,7 @@
           <a:p>
             <a:r>
               <a:rPr lang="en-US" dirty="0"/>
-              <a:t>For Task 3 we model each link as L over B plus other delays, on the 1 gigabit links from the spec. The question is how each message type scales.</a:t>
+              <a:t>Not presented: duplicate this divider's style for any extra slides (full delay arithmetic, extra graphs, code snippets) so markers can tell them apart from the assessed sections.</a:t>
             </a:r>
             <a:endParaRPr lang="en-US" dirty="0"/>
           </a:p>
@@ -1506,94 +1149,6 @@
             <a:fld id="{F7021451-1387-4CA6-816F-3879F97B5CBC}" type="slidenum">
               <a:rPr lang="en-US"/>
               <a:t>8</a:t>
-            </a:fld>
-            <a:endParaRPr lang="en-US"/>
-          </a:p>
-        </p:txBody>
-      </p:sp>
-    </p:spTree>
-    <p:extLst>
-      <p:ext uri="{BB962C8B-B14F-4D97-AF65-F5344CB8AC3E}">
-        <p14:creationId xmlns:p14="http://schemas.microsoft.com/office/powerpoint/2010/main" val="1024086991"/>
-      </p:ext>
-    </p:extLst>
-  </p:cSld>
-  <p:clrMapOvr>
-    <a:masterClrMapping/>
-  </p:clrMapOvr>
-</p:notes>
-</file>
-
-<file path=ppt/notesSlides/notesSlide9.xml><?xml version="1.0" encoding="utf-8"?>
-<p:notes xmlns:a="http://schemas.openxmlformats.org/drawingml/2006/main" xmlns:r="http://schemas.openxmlformats.org/officeDocument/2006/relationships" xmlns:p="http://schemas.openxmlformats.org/presentationml/2006/main">
-  <p:cSld>
-    <p:spTree>
-      <p:nvGrpSpPr>
-        <p:cNvPr id="1" name=""/>
-        <p:cNvGrpSpPr/>
-        <p:nvPr/>
-      </p:nvGrpSpPr>
-      <p:grpSpPr>
-        <a:xfrm>
-          <a:off x="0" y="0"/>
-          <a:ext cx="0" cy="0"/>
-          <a:chOff x="0" y="0"/>
-          <a:chExt cx="0" cy="0"/>
-        </a:xfrm>
-      </p:grpSpPr>
-      <p:sp>
-        <p:nvSpPr>
-          <p:cNvPr id="2" name="Slide Image Placeholder 1"/>
-          <p:cNvSpPr>
-            <a:spLocks noGrp="1" noRot="1" noChangeAspect="1"/>
-          </p:cNvSpPr>
-          <p:nvPr>
-            <p:ph type="sldImg"/>
-          </p:nvPr>
-        </p:nvSpPr>
-        <p:spPr/>
-      </p:sp>
-      <p:sp>
-        <p:nvSpPr>
-          <p:cNvPr id="3" name="Notes Placeholder 2"/>
-          <p:cNvSpPr>
-            <a:spLocks noGrp="1"/>
-          </p:cNvSpPr>
-          <p:nvPr>
-            <p:ph type="body" idx="1"/>
-          </p:nvPr>
-        </p:nvSpPr>
-        <p:spPr/>
-        <p:txBody>
-          <a:bodyPr/>
-          <a:lstStyle/>
-          <a:p>
-            <a:r>
-              <a:rPr lang="en-US" dirty="0"/>
-              <a:t>Neighbour messages are constant time in the number of nodes, because a mesh caps every node at four neighbours; that's the flat line. Alerts all converge on the base station's single link, so their worst-case delay grows linearly with node count; that's the climbing line. The star hub is the scalability limit of this design.</a:t>
-            </a:r>
-            <a:endParaRPr lang="en-US" dirty="0"/>
-          </a:p>
-        </p:txBody>
-      </p:sp>
-      <p:sp>
-        <p:nvSpPr>
-          <p:cNvPr id="4" name="Slide Number Placeholder 3"/>
-          <p:cNvSpPr>
-            <a:spLocks noGrp="1"/>
-          </p:cNvSpPr>
-          <p:nvPr>
-            <p:ph type="sldNum" sz="quarter" idx="10"/>
-          </p:nvPr>
-        </p:nvSpPr>
-        <p:spPr/>
-        <p:txBody>
-          <a:bodyPr/>
-          <a:lstStyle/>
-          <a:p>
-            <a:fld id="{F7021451-1387-4CA6-816F-3879F97B5CBC}" type="slidenum">
-              <a:rPr lang="en-US"/>
-              <a:t>9</a:t>
             </a:fld>
             <a:endParaRPr lang="en-US"/>
           </a:p>
@@ -2390,1318 +1945,6 @@
                 <a:cs typeface="Calibri" pitchFamily="34" charset="-120"/>
               </a:rPr>
               <a:t>Taabish [surname]  |  [student ID]  |  [Monash email]</a:t>
-            </a:r>
-            <a:endParaRPr lang="en-US" sz="1400" dirty="0"/>
-          </a:p>
-        </p:txBody>
-      </p:sp>
-    </p:spTree>
-  </p:cSld>
-  <p:clrMapOvr>
-    <a:masterClrMapping/>
-  </p:clrMapOvr>
-</p:sld>
-</file>
-
-<file path=ppt/slides/slide10.xml><?xml version="1.0" encoding="utf-8"?>
-<p:sld xmlns:a="http://schemas.openxmlformats.org/drawingml/2006/main" xmlns:r="http://schemas.openxmlformats.org/officeDocument/2006/relationships" xmlns:p="http://schemas.openxmlformats.org/presentationml/2006/main">
-  <p:cSld name="Slide 10">
-    <p:bg>
-      <p:bgPr>
-        <a:solidFill>
-          <a:srgbClr val="FFFFFF"/>
-        </a:solidFill>
-      </p:bgPr>
-    </p:bg>
-    <p:spTree>
-      <p:nvGrpSpPr>
-        <p:cNvPr id="1" name=""/>
-        <p:cNvGrpSpPr/>
-        <p:nvPr/>
-      </p:nvGrpSpPr>
-      <p:grpSpPr>
-        <a:xfrm>
-          <a:off x="0" y="0"/>
-          <a:ext cx="0" cy="0"/>
-          <a:chOff x="0" y="0"/>
-          <a:chExt cx="0" cy="0"/>
-        </a:xfrm>
-      </p:grpSpPr>
-      <p:sp>
-        <p:nvSpPr>
-          <p:cNvPr id="2" name="Text 0"/>
-          <p:cNvSpPr/>
-          <p:nvPr/>
-        </p:nvSpPr>
-        <p:spPr>
-          <a:xfrm>
-            <a:off x="548640" y="292608"/>
-            <a:ext cx="5943600" cy="274320"/>
-          </a:xfrm>
-          <a:prstGeom prst="rect">
-            <a:avLst/>
-          </a:prstGeom>
-          <a:noFill/>
-          <a:ln/>
-        </p:spPr>
-        <p:txBody>
-          <a:bodyPr wrap="square" lIns="0" tIns="0" rIns="0" bIns="0" rtlCol="0" anchor="ctr"/>
-          <a:lstStyle/>
-          <a:p>
-            <a:pPr indent="0" marL="0">
-              <a:buNone/>
-            </a:pPr>
-            <a:r>
-              <a:rPr lang="en-US" sz="1200" b="1" spc="200" kern="0" dirty="0">
-                <a:solidFill>
-                  <a:srgbClr val="7C4DBE"/>
-                </a:solidFill>
-                <a:latin typeface="Calibri" pitchFamily="34" charset="0"/>
-                <a:ea typeface="Calibri" pitchFamily="34" charset="-122"/>
-                <a:cs typeface="Calibri" pitchFamily="34" charset="-120"/>
-              </a:rPr>
-              <a:t>TASK 3</a:t>
-            </a:r>
-            <a:endParaRPr lang="en-US" sz="1200" dirty="0"/>
-          </a:p>
-        </p:txBody>
-      </p:sp>
-      <p:sp>
-        <p:nvSpPr>
-          <p:cNvPr id="3" name="Text 1"/>
-          <p:cNvSpPr/>
-          <p:nvPr/>
-        </p:nvSpPr>
-        <p:spPr>
-          <a:xfrm>
-            <a:off x="548640" y="548640"/>
-            <a:ext cx="8046720" cy="685800"/>
-          </a:xfrm>
-          <a:prstGeom prst="rect">
-            <a:avLst/>
-          </a:prstGeom>
-          <a:noFill/>
-          <a:ln/>
-        </p:spPr>
-        <p:txBody>
-          <a:bodyPr wrap="square" lIns="0" tIns="0" rIns="0" bIns="0" rtlCol="0" anchor="ctr"/>
-          <a:lstStyle/>
-          <a:p>
-            <a:pPr indent="0" marL="0">
-              <a:buNone/>
-            </a:pPr>
-            <a:r>
-              <a:rPr lang="en-US" sz="3000" b="1" dirty="0">
-                <a:solidFill>
-                  <a:srgbClr val="5B2D8E"/>
-                </a:solidFill>
-                <a:latin typeface="Calibri" pitchFamily="34" charset="0"/>
-                <a:ea typeface="Calibri" pitchFamily="34" charset="-122"/>
-                <a:cs typeface="Calibri" pitchFamily="34" charset="-120"/>
-              </a:rPr>
-              <a:t>Scaling with base stations</a:t>
-            </a:r>
-            <a:endParaRPr lang="en-US" sz="3000" dirty="0"/>
-          </a:p>
-        </p:txBody>
-      </p:sp>
-      <p:sp>
-        <p:nvSpPr>
-          <p:cNvPr id="4" name="Shape 2"/>
-          <p:cNvSpPr/>
-          <p:nvPr/>
-        </p:nvSpPr>
-        <p:spPr>
-          <a:xfrm>
-            <a:off x="8275320" y="384048"/>
-            <a:ext cx="384048" cy="0"/>
-          </a:xfrm>
-          <a:prstGeom prst="line">
-            <a:avLst/>
-          </a:prstGeom>
-          <a:noFill/>
-          <a:ln w="12700">
-            <a:solidFill>
-              <a:srgbClr val="D9CBEF"/>
-            </a:solidFill>
-            <a:prstDash val="solid"/>
-          </a:ln>
-        </p:spPr>
-      </p:sp>
-      <p:sp>
-        <p:nvSpPr>
-          <p:cNvPr id="5" name="Shape 3"/>
-          <p:cNvSpPr/>
-          <p:nvPr/>
-        </p:nvSpPr>
-        <p:spPr>
-          <a:xfrm>
-            <a:off x="8275320" y="384048"/>
-            <a:ext cx="0" cy="384048"/>
-          </a:xfrm>
-          <a:prstGeom prst="line">
-            <a:avLst/>
-          </a:prstGeom>
-          <a:noFill/>
-          <a:ln w="12700">
-            <a:solidFill>
-              <a:srgbClr val="D9CBEF"/>
-            </a:solidFill>
-            <a:prstDash val="solid"/>
-          </a:ln>
-        </p:spPr>
-      </p:sp>
-      <p:sp>
-        <p:nvSpPr>
-          <p:cNvPr id="6" name="Shape 4"/>
-          <p:cNvSpPr/>
-          <p:nvPr/>
-        </p:nvSpPr>
-        <p:spPr>
-          <a:xfrm>
-            <a:off x="8275320" y="576072"/>
-            <a:ext cx="384048" cy="0"/>
-          </a:xfrm>
-          <a:prstGeom prst="line">
-            <a:avLst/>
-          </a:prstGeom>
-          <a:noFill/>
-          <a:ln w="12700">
-            <a:solidFill>
-              <a:srgbClr val="D9CBEF"/>
-            </a:solidFill>
-            <a:prstDash val="solid"/>
-          </a:ln>
-        </p:spPr>
-      </p:sp>
-      <p:sp>
-        <p:nvSpPr>
-          <p:cNvPr id="7" name="Shape 5"/>
-          <p:cNvSpPr/>
-          <p:nvPr/>
-        </p:nvSpPr>
-        <p:spPr>
-          <a:xfrm>
-            <a:off x="8467344" y="384048"/>
-            <a:ext cx="0" cy="384048"/>
-          </a:xfrm>
-          <a:prstGeom prst="line">
-            <a:avLst/>
-          </a:prstGeom>
-          <a:noFill/>
-          <a:ln w="12700">
-            <a:solidFill>
-              <a:srgbClr val="D9CBEF"/>
-            </a:solidFill>
-            <a:prstDash val="solid"/>
-          </a:ln>
-        </p:spPr>
-      </p:sp>
-      <p:sp>
-        <p:nvSpPr>
-          <p:cNvPr id="8" name="Shape 6"/>
-          <p:cNvSpPr/>
-          <p:nvPr/>
-        </p:nvSpPr>
-        <p:spPr>
-          <a:xfrm>
-            <a:off x="8275320" y="768096"/>
-            <a:ext cx="384048" cy="0"/>
-          </a:xfrm>
-          <a:prstGeom prst="line">
-            <a:avLst/>
-          </a:prstGeom>
-          <a:noFill/>
-          <a:ln w="12700">
-            <a:solidFill>
-              <a:srgbClr val="D9CBEF"/>
-            </a:solidFill>
-            <a:prstDash val="solid"/>
-          </a:ln>
-        </p:spPr>
-      </p:sp>
-      <p:sp>
-        <p:nvSpPr>
-          <p:cNvPr id="9" name="Shape 7"/>
-          <p:cNvSpPr/>
-          <p:nvPr/>
-        </p:nvSpPr>
-        <p:spPr>
-          <a:xfrm>
-            <a:off x="8659368" y="384048"/>
-            <a:ext cx="0" cy="384048"/>
-          </a:xfrm>
-          <a:prstGeom prst="line">
-            <a:avLst/>
-          </a:prstGeom>
-          <a:noFill/>
-          <a:ln w="12700">
-            <a:solidFill>
-              <a:srgbClr val="D9CBEF"/>
-            </a:solidFill>
-            <a:prstDash val="solid"/>
-          </a:ln>
-        </p:spPr>
-      </p:sp>
-      <p:sp>
-        <p:nvSpPr>
-          <p:cNvPr id="10" name="Shape 8"/>
-          <p:cNvSpPr/>
-          <p:nvPr/>
-        </p:nvSpPr>
-        <p:spPr>
-          <a:xfrm>
-            <a:off x="8234172" y="342900"/>
-            <a:ext cx="82296" cy="82296"/>
-          </a:xfrm>
-          <a:prstGeom prst="ellipse">
-            <a:avLst/>
-          </a:prstGeom>
-          <a:solidFill>
-            <a:srgbClr val="7C4DBE"/>
-          </a:solidFill>
-          <a:ln/>
-        </p:spPr>
-      </p:sp>
-      <p:sp>
-        <p:nvSpPr>
-          <p:cNvPr id="11" name="Shape 9"/>
-          <p:cNvSpPr/>
-          <p:nvPr/>
-        </p:nvSpPr>
-        <p:spPr>
-          <a:xfrm>
-            <a:off x="8234172" y="534924"/>
-            <a:ext cx="82296" cy="82296"/>
-          </a:xfrm>
-          <a:prstGeom prst="ellipse">
-            <a:avLst/>
-          </a:prstGeom>
-          <a:solidFill>
-            <a:srgbClr val="7C4DBE"/>
-          </a:solidFill>
-          <a:ln/>
-        </p:spPr>
-      </p:sp>
-      <p:sp>
-        <p:nvSpPr>
-          <p:cNvPr id="12" name="Shape 10"/>
-          <p:cNvSpPr/>
-          <p:nvPr/>
-        </p:nvSpPr>
-        <p:spPr>
-          <a:xfrm>
-            <a:off x="8234172" y="726948"/>
-            <a:ext cx="82296" cy="82296"/>
-          </a:xfrm>
-          <a:prstGeom prst="ellipse">
-            <a:avLst/>
-          </a:prstGeom>
-          <a:solidFill>
-            <a:srgbClr val="7C4DBE"/>
-          </a:solidFill>
-          <a:ln/>
-        </p:spPr>
-      </p:sp>
-      <p:sp>
-        <p:nvSpPr>
-          <p:cNvPr id="13" name="Shape 11"/>
-          <p:cNvSpPr/>
-          <p:nvPr/>
-        </p:nvSpPr>
-        <p:spPr>
-          <a:xfrm>
-            <a:off x="8426196" y="342900"/>
-            <a:ext cx="82296" cy="82296"/>
-          </a:xfrm>
-          <a:prstGeom prst="ellipse">
-            <a:avLst/>
-          </a:prstGeom>
-          <a:solidFill>
-            <a:srgbClr val="7C4DBE"/>
-          </a:solidFill>
-          <a:ln/>
-        </p:spPr>
-      </p:sp>
-      <p:sp>
-        <p:nvSpPr>
-          <p:cNvPr id="14" name="Shape 12"/>
-          <p:cNvSpPr/>
-          <p:nvPr/>
-        </p:nvSpPr>
-        <p:spPr>
-          <a:xfrm>
-            <a:off x="8426196" y="534924"/>
-            <a:ext cx="82296" cy="82296"/>
-          </a:xfrm>
-          <a:prstGeom prst="ellipse">
-            <a:avLst/>
-          </a:prstGeom>
-          <a:solidFill>
-            <a:srgbClr val="5B2D8E"/>
-          </a:solidFill>
-          <a:ln/>
-        </p:spPr>
-      </p:sp>
-      <p:sp>
-        <p:nvSpPr>
-          <p:cNvPr id="15" name="Shape 13"/>
-          <p:cNvSpPr/>
-          <p:nvPr/>
-        </p:nvSpPr>
-        <p:spPr>
-          <a:xfrm>
-            <a:off x="8426196" y="726948"/>
-            <a:ext cx="82296" cy="82296"/>
-          </a:xfrm>
-          <a:prstGeom prst="ellipse">
-            <a:avLst/>
-          </a:prstGeom>
-          <a:solidFill>
-            <a:srgbClr val="7C4DBE"/>
-          </a:solidFill>
-          <a:ln/>
-        </p:spPr>
-      </p:sp>
-      <p:sp>
-        <p:nvSpPr>
-          <p:cNvPr id="16" name="Shape 14"/>
-          <p:cNvSpPr/>
-          <p:nvPr/>
-        </p:nvSpPr>
-        <p:spPr>
-          <a:xfrm>
-            <a:off x="8618220" y="342900"/>
-            <a:ext cx="82296" cy="82296"/>
-          </a:xfrm>
-          <a:prstGeom prst="ellipse">
-            <a:avLst/>
-          </a:prstGeom>
-          <a:solidFill>
-            <a:srgbClr val="7C4DBE"/>
-          </a:solidFill>
-          <a:ln/>
-        </p:spPr>
-      </p:sp>
-      <p:sp>
-        <p:nvSpPr>
-          <p:cNvPr id="17" name="Shape 15"/>
-          <p:cNvSpPr/>
-          <p:nvPr/>
-        </p:nvSpPr>
-        <p:spPr>
-          <a:xfrm>
-            <a:off x="8618220" y="534924"/>
-            <a:ext cx="82296" cy="82296"/>
-          </a:xfrm>
-          <a:prstGeom prst="ellipse">
-            <a:avLst/>
-          </a:prstGeom>
-          <a:solidFill>
-            <a:srgbClr val="7C4DBE"/>
-          </a:solidFill>
-          <a:ln/>
-        </p:spPr>
-      </p:sp>
-      <p:sp>
-        <p:nvSpPr>
-          <p:cNvPr id="18" name="Shape 16"/>
-          <p:cNvSpPr/>
-          <p:nvPr/>
-        </p:nvSpPr>
-        <p:spPr>
-          <a:xfrm>
-            <a:off x="8618220" y="726948"/>
-            <a:ext cx="82296" cy="82296"/>
-          </a:xfrm>
-          <a:prstGeom prst="ellipse">
-            <a:avLst/>
-          </a:prstGeom>
-          <a:solidFill>
-            <a:srgbClr val="7C4DBE"/>
-          </a:solidFill>
-          <a:ln/>
-        </p:spPr>
-      </p:sp>
-      <p:sp>
-        <p:nvSpPr>
-          <p:cNvPr id="19" name="Text 17"/>
-          <p:cNvSpPr/>
-          <p:nvPr/>
-        </p:nvSpPr>
-        <p:spPr>
-          <a:xfrm>
-            <a:off x="548640" y="1508760"/>
-            <a:ext cx="3383280" cy="3108960"/>
-          </a:xfrm>
-          <a:prstGeom prst="rect">
-            <a:avLst/>
-          </a:prstGeom>
-          <a:noFill/>
-          <a:ln/>
-        </p:spPr>
-        <p:txBody>
-          <a:bodyPr wrap="square" lIns="0" tIns="0" rIns="0" bIns="0" rtlCol="0" anchor="t"/>
-          <a:lstStyle/>
-          <a:p>
-            <a:pPr marL="152400" indent="-152400">
-              <a:spcAft>
-                <a:spcPts val="1000"/>
-              </a:spcAft>
-              <a:buSzPct val="100000"/>
-              <a:buChar char="•"/>
-            </a:pPr>
-            <a:r>
-              <a:rPr lang="en-US" sz="1450" dirty="0">
-                <a:solidFill>
-                  <a:srgbClr val="2B2140"/>
-                </a:solidFill>
-                <a:latin typeface="Calibri" pitchFamily="34" charset="0"/>
-                <a:ea typeface="Calibri" pitchFamily="34" charset="-122"/>
-                <a:cs typeface="Calibri" pitchFamily="34" charset="-120"/>
-              </a:rPr>
-              <a:t>b stations → each handles ≈ n/b → delay O(n/b)</a:t>
-            </a:r>
-            <a:endParaRPr lang="en-US" sz="1450" dirty="0"/>
-          </a:p>
-          <a:p>
-            <a:pPr marL="152400" indent="-152400">
-              <a:spcAft>
-                <a:spcPts val="1000"/>
-              </a:spcAft>
-              <a:buSzPct val="100000"/>
-              <a:buChar char="•"/>
-            </a:pPr>
-            <a:r>
-              <a:rPr lang="en-US" sz="1450" dirty="0">
-                <a:solidFill>
-                  <a:srgbClr val="2B2140"/>
-                </a:solidFill>
-                <a:latin typeface="Calibri" pitchFamily="34" charset="0"/>
-                <a:ea typeface="Calibri" pitchFamily="34" charset="-122"/>
-                <a:cs typeface="Calibri" pitchFamily="34" charset="-120"/>
-              </a:rPr>
-              <a:t>Diminishing returns: availability table must sync</a:t>
-            </a:r>
-            <a:endParaRPr lang="en-US" sz="1450" dirty="0"/>
-          </a:p>
-          <a:p>
-            <a:pPr marL="152400" indent="-152400">
-              <a:spcAft>
-                <a:spcPts val="1000"/>
-              </a:spcAft>
-              <a:buSzPct val="100000"/>
-              <a:buChar char="•"/>
-            </a:pPr>
-            <a:r>
-              <a:rPr lang="en-US" sz="1450" dirty="0">
-                <a:solidFill>
-                  <a:srgbClr val="2B2140"/>
-                </a:solidFill>
-                <a:latin typeface="Calibri" pitchFamily="34" charset="0"/>
-                <a:ea typeface="Calibri" pitchFamily="34" charset="-122"/>
-                <a:cs typeface="Calibri" pitchFamily="34" charset="-120"/>
-              </a:rPr>
-              <a:t>Sync overhead = the serial fraction</a:t>
-            </a:r>
-            <a:endParaRPr lang="en-US" sz="1450" dirty="0"/>
-          </a:p>
-        </p:txBody>
-      </p:sp>
-      <p:pic>
-        <p:nvPicPr>
-          <p:cNvPr id="20" name="Image 0" descr="/Users/erwynasoo/FIT3143/Week6_Applied1/solution/graphs/delay_vs_base_stations.png">    </p:cNvPr>
-          <p:cNvPicPr>
-            <a:picLocks noChangeAspect="1"/>
-          </p:cNvPicPr>
-          <p:nvPr/>
-        </p:nvPicPr>
-        <p:blipFill>
-          <a:blip r:embed="rId1"/>
-          <a:stretch>
-            <a:fillRect/>
-          </a:stretch>
-        </p:blipFill>
-        <p:spPr>
-          <a:xfrm>
-            <a:off x="4114800" y="1371600"/>
-            <a:ext cx="4572000" cy="3246120"/>
-          </a:xfrm>
-          <a:prstGeom prst="rect">
-            <a:avLst/>
-          </a:prstGeom>
-        </p:spPr>
-      </p:pic>
-    </p:spTree>
-  </p:cSld>
-  <p:clrMapOvr>
-    <a:masterClrMapping/>
-  </p:clrMapOvr>
-</p:sld>
-</file>
-
-<file path=ppt/slides/slide11.xml><?xml version="1.0" encoding="utf-8"?>
-<p:sld xmlns:a="http://schemas.openxmlformats.org/drawingml/2006/main" xmlns:r="http://schemas.openxmlformats.org/officeDocument/2006/relationships" xmlns:p="http://schemas.openxmlformats.org/presentationml/2006/main">
-  <p:cSld name="Slide 11">
-    <p:bg>
-      <p:bgPr>
-        <a:solidFill>
-          <a:srgbClr val="FFFFFF"/>
-        </a:solidFill>
-      </p:bgPr>
-    </p:bg>
-    <p:spTree>
-      <p:nvGrpSpPr>
-        <p:cNvPr id="1" name=""/>
-        <p:cNvGrpSpPr/>
-        <p:nvPr/>
-      </p:nvGrpSpPr>
-      <p:grpSpPr>
-        <a:xfrm>
-          <a:off x="0" y="0"/>
-          <a:ext cx="0" cy="0"/>
-          <a:chOff x="0" y="0"/>
-          <a:chExt cx="0" cy="0"/>
-        </a:xfrm>
-      </p:grpSpPr>
-      <p:sp>
-        <p:nvSpPr>
-          <p:cNvPr id="2" name="Text 0"/>
-          <p:cNvSpPr/>
-          <p:nvPr/>
-        </p:nvSpPr>
-        <p:spPr>
-          <a:xfrm>
-            <a:off x="548640" y="292608"/>
-            <a:ext cx="5943600" cy="274320"/>
-          </a:xfrm>
-          <a:prstGeom prst="rect">
-            <a:avLst/>
-          </a:prstGeom>
-          <a:noFill/>
-          <a:ln/>
-        </p:spPr>
-        <p:txBody>
-          <a:bodyPr wrap="square" lIns="0" tIns="0" rIns="0" bIns="0" rtlCol="0" anchor="ctr"/>
-          <a:lstStyle/>
-          <a:p>
-            <a:pPr indent="0" marL="0">
-              <a:buNone/>
-            </a:pPr>
-            <a:r>
-              <a:rPr lang="en-US" sz="1200" b="1" spc="200" kern="0" dirty="0">
-                <a:solidFill>
-                  <a:srgbClr val="7C4DBE"/>
-                </a:solidFill>
-                <a:latin typeface="Calibri" pitchFamily="34" charset="0"/>
-                <a:ea typeface="Calibri" pitchFamily="34" charset="-122"/>
-                <a:cs typeface="Calibri" pitchFamily="34" charset="-120"/>
-              </a:rPr>
-              <a:t>WRAP-UP</a:t>
-            </a:r>
-            <a:endParaRPr lang="en-US" sz="1200" dirty="0"/>
-          </a:p>
-        </p:txBody>
-      </p:sp>
-      <p:sp>
-        <p:nvSpPr>
-          <p:cNvPr id="3" name="Text 1"/>
-          <p:cNvSpPr/>
-          <p:nvPr/>
-        </p:nvSpPr>
-        <p:spPr>
-          <a:xfrm>
-            <a:off x="548640" y="548640"/>
-            <a:ext cx="8046720" cy="685800"/>
-          </a:xfrm>
-          <a:prstGeom prst="rect">
-            <a:avLst/>
-          </a:prstGeom>
-          <a:noFill/>
-          <a:ln/>
-        </p:spPr>
-        <p:txBody>
-          <a:bodyPr wrap="square" lIns="0" tIns="0" rIns="0" bIns="0" rtlCol="0" anchor="ctr"/>
-          <a:lstStyle/>
-          <a:p>
-            <a:pPr indent="0" marL="0">
-              <a:buNone/>
-            </a:pPr>
-            <a:r>
-              <a:rPr lang="en-US" sz="3000" b="1" dirty="0">
-                <a:solidFill>
-                  <a:srgbClr val="5B2D8E"/>
-                </a:solidFill>
-                <a:latin typeface="Calibri" pitchFamily="34" charset="0"/>
-                <a:ea typeface="Calibri" pitchFamily="34" charset="-122"/>
-                <a:cs typeface="Calibri" pitchFamily="34" charset="-120"/>
-              </a:rPr>
-              <a:t>Conclusion, limitations, future work</a:t>
-            </a:r>
-            <a:endParaRPr lang="en-US" sz="3000" dirty="0"/>
-          </a:p>
-        </p:txBody>
-      </p:sp>
-      <p:sp>
-        <p:nvSpPr>
-          <p:cNvPr id="4" name="Shape 2"/>
-          <p:cNvSpPr/>
-          <p:nvPr/>
-        </p:nvSpPr>
-        <p:spPr>
-          <a:xfrm>
-            <a:off x="8275320" y="384048"/>
-            <a:ext cx="384048" cy="0"/>
-          </a:xfrm>
-          <a:prstGeom prst="line">
-            <a:avLst/>
-          </a:prstGeom>
-          <a:noFill/>
-          <a:ln w="12700">
-            <a:solidFill>
-              <a:srgbClr val="D9CBEF"/>
-            </a:solidFill>
-            <a:prstDash val="solid"/>
-          </a:ln>
-        </p:spPr>
-      </p:sp>
-      <p:sp>
-        <p:nvSpPr>
-          <p:cNvPr id="5" name="Shape 3"/>
-          <p:cNvSpPr/>
-          <p:nvPr/>
-        </p:nvSpPr>
-        <p:spPr>
-          <a:xfrm>
-            <a:off x="8275320" y="384048"/>
-            <a:ext cx="0" cy="384048"/>
-          </a:xfrm>
-          <a:prstGeom prst="line">
-            <a:avLst/>
-          </a:prstGeom>
-          <a:noFill/>
-          <a:ln w="12700">
-            <a:solidFill>
-              <a:srgbClr val="D9CBEF"/>
-            </a:solidFill>
-            <a:prstDash val="solid"/>
-          </a:ln>
-        </p:spPr>
-      </p:sp>
-      <p:sp>
-        <p:nvSpPr>
-          <p:cNvPr id="6" name="Shape 4"/>
-          <p:cNvSpPr/>
-          <p:nvPr/>
-        </p:nvSpPr>
-        <p:spPr>
-          <a:xfrm>
-            <a:off x="8275320" y="576072"/>
-            <a:ext cx="384048" cy="0"/>
-          </a:xfrm>
-          <a:prstGeom prst="line">
-            <a:avLst/>
-          </a:prstGeom>
-          <a:noFill/>
-          <a:ln w="12700">
-            <a:solidFill>
-              <a:srgbClr val="D9CBEF"/>
-            </a:solidFill>
-            <a:prstDash val="solid"/>
-          </a:ln>
-        </p:spPr>
-      </p:sp>
-      <p:sp>
-        <p:nvSpPr>
-          <p:cNvPr id="7" name="Shape 5"/>
-          <p:cNvSpPr/>
-          <p:nvPr/>
-        </p:nvSpPr>
-        <p:spPr>
-          <a:xfrm>
-            <a:off x="8467344" y="384048"/>
-            <a:ext cx="0" cy="384048"/>
-          </a:xfrm>
-          <a:prstGeom prst="line">
-            <a:avLst/>
-          </a:prstGeom>
-          <a:noFill/>
-          <a:ln w="12700">
-            <a:solidFill>
-              <a:srgbClr val="D9CBEF"/>
-            </a:solidFill>
-            <a:prstDash val="solid"/>
-          </a:ln>
-        </p:spPr>
-      </p:sp>
-      <p:sp>
-        <p:nvSpPr>
-          <p:cNvPr id="8" name="Shape 6"/>
-          <p:cNvSpPr/>
-          <p:nvPr/>
-        </p:nvSpPr>
-        <p:spPr>
-          <a:xfrm>
-            <a:off x="8275320" y="768096"/>
-            <a:ext cx="384048" cy="0"/>
-          </a:xfrm>
-          <a:prstGeom prst="line">
-            <a:avLst/>
-          </a:prstGeom>
-          <a:noFill/>
-          <a:ln w="12700">
-            <a:solidFill>
-              <a:srgbClr val="D9CBEF"/>
-            </a:solidFill>
-            <a:prstDash val="solid"/>
-          </a:ln>
-        </p:spPr>
-      </p:sp>
-      <p:sp>
-        <p:nvSpPr>
-          <p:cNvPr id="9" name="Shape 7"/>
-          <p:cNvSpPr/>
-          <p:nvPr/>
-        </p:nvSpPr>
-        <p:spPr>
-          <a:xfrm>
-            <a:off x="8659368" y="384048"/>
-            <a:ext cx="0" cy="384048"/>
-          </a:xfrm>
-          <a:prstGeom prst="line">
-            <a:avLst/>
-          </a:prstGeom>
-          <a:noFill/>
-          <a:ln w="12700">
-            <a:solidFill>
-              <a:srgbClr val="D9CBEF"/>
-            </a:solidFill>
-            <a:prstDash val="solid"/>
-          </a:ln>
-        </p:spPr>
-      </p:sp>
-      <p:sp>
-        <p:nvSpPr>
-          <p:cNvPr id="10" name="Shape 8"/>
-          <p:cNvSpPr/>
-          <p:nvPr/>
-        </p:nvSpPr>
-        <p:spPr>
-          <a:xfrm>
-            <a:off x="8234172" y="342900"/>
-            <a:ext cx="82296" cy="82296"/>
-          </a:xfrm>
-          <a:prstGeom prst="ellipse">
-            <a:avLst/>
-          </a:prstGeom>
-          <a:solidFill>
-            <a:srgbClr val="7C4DBE"/>
-          </a:solidFill>
-          <a:ln/>
-        </p:spPr>
-      </p:sp>
-      <p:sp>
-        <p:nvSpPr>
-          <p:cNvPr id="11" name="Shape 9"/>
-          <p:cNvSpPr/>
-          <p:nvPr/>
-        </p:nvSpPr>
-        <p:spPr>
-          <a:xfrm>
-            <a:off x="8234172" y="534924"/>
-            <a:ext cx="82296" cy="82296"/>
-          </a:xfrm>
-          <a:prstGeom prst="ellipse">
-            <a:avLst/>
-          </a:prstGeom>
-          <a:solidFill>
-            <a:srgbClr val="7C4DBE"/>
-          </a:solidFill>
-          <a:ln/>
-        </p:spPr>
-      </p:sp>
-      <p:sp>
-        <p:nvSpPr>
-          <p:cNvPr id="12" name="Shape 10"/>
-          <p:cNvSpPr/>
-          <p:nvPr/>
-        </p:nvSpPr>
-        <p:spPr>
-          <a:xfrm>
-            <a:off x="8234172" y="726948"/>
-            <a:ext cx="82296" cy="82296"/>
-          </a:xfrm>
-          <a:prstGeom prst="ellipse">
-            <a:avLst/>
-          </a:prstGeom>
-          <a:solidFill>
-            <a:srgbClr val="7C4DBE"/>
-          </a:solidFill>
-          <a:ln/>
-        </p:spPr>
-      </p:sp>
-      <p:sp>
-        <p:nvSpPr>
-          <p:cNvPr id="13" name="Shape 11"/>
-          <p:cNvSpPr/>
-          <p:nvPr/>
-        </p:nvSpPr>
-        <p:spPr>
-          <a:xfrm>
-            <a:off x="8426196" y="342900"/>
-            <a:ext cx="82296" cy="82296"/>
-          </a:xfrm>
-          <a:prstGeom prst="ellipse">
-            <a:avLst/>
-          </a:prstGeom>
-          <a:solidFill>
-            <a:srgbClr val="7C4DBE"/>
-          </a:solidFill>
-          <a:ln/>
-        </p:spPr>
-      </p:sp>
-      <p:sp>
-        <p:nvSpPr>
-          <p:cNvPr id="14" name="Shape 12"/>
-          <p:cNvSpPr/>
-          <p:nvPr/>
-        </p:nvSpPr>
-        <p:spPr>
-          <a:xfrm>
-            <a:off x="8426196" y="534924"/>
-            <a:ext cx="82296" cy="82296"/>
-          </a:xfrm>
-          <a:prstGeom prst="ellipse">
-            <a:avLst/>
-          </a:prstGeom>
-          <a:solidFill>
-            <a:srgbClr val="5B2D8E"/>
-          </a:solidFill>
-          <a:ln/>
-        </p:spPr>
-      </p:sp>
-      <p:sp>
-        <p:nvSpPr>
-          <p:cNvPr id="15" name="Shape 13"/>
-          <p:cNvSpPr/>
-          <p:nvPr/>
-        </p:nvSpPr>
-        <p:spPr>
-          <a:xfrm>
-            <a:off x="8426196" y="726948"/>
-            <a:ext cx="82296" cy="82296"/>
-          </a:xfrm>
-          <a:prstGeom prst="ellipse">
-            <a:avLst/>
-          </a:prstGeom>
-          <a:solidFill>
-            <a:srgbClr val="7C4DBE"/>
-          </a:solidFill>
-          <a:ln/>
-        </p:spPr>
-      </p:sp>
-      <p:sp>
-        <p:nvSpPr>
-          <p:cNvPr id="16" name="Shape 14"/>
-          <p:cNvSpPr/>
-          <p:nvPr/>
-        </p:nvSpPr>
-        <p:spPr>
-          <a:xfrm>
-            <a:off x="8618220" y="342900"/>
-            <a:ext cx="82296" cy="82296"/>
-          </a:xfrm>
-          <a:prstGeom prst="ellipse">
-            <a:avLst/>
-          </a:prstGeom>
-          <a:solidFill>
-            <a:srgbClr val="7C4DBE"/>
-          </a:solidFill>
-          <a:ln/>
-        </p:spPr>
-      </p:sp>
-      <p:sp>
-        <p:nvSpPr>
-          <p:cNvPr id="17" name="Shape 15"/>
-          <p:cNvSpPr/>
-          <p:nvPr/>
-        </p:nvSpPr>
-        <p:spPr>
-          <a:xfrm>
-            <a:off x="8618220" y="534924"/>
-            <a:ext cx="82296" cy="82296"/>
-          </a:xfrm>
-          <a:prstGeom prst="ellipse">
-            <a:avLst/>
-          </a:prstGeom>
-          <a:solidFill>
-            <a:srgbClr val="7C4DBE"/>
-          </a:solidFill>
-          <a:ln/>
-        </p:spPr>
-      </p:sp>
-      <p:sp>
-        <p:nvSpPr>
-          <p:cNvPr id="18" name="Shape 16"/>
-          <p:cNvSpPr/>
-          <p:nvPr/>
-        </p:nvSpPr>
-        <p:spPr>
-          <a:xfrm>
-            <a:off x="8618220" y="726948"/>
-            <a:ext cx="82296" cy="82296"/>
-          </a:xfrm>
-          <a:prstGeom prst="ellipse">
-            <a:avLst/>
-          </a:prstGeom>
-          <a:solidFill>
-            <a:srgbClr val="7C4DBE"/>
-          </a:solidFill>
-          <a:ln/>
-        </p:spPr>
-      </p:sp>
-      <p:sp>
-        <p:nvSpPr>
-          <p:cNvPr id="19" name="Text 17"/>
-          <p:cNvSpPr/>
-          <p:nvPr/>
-        </p:nvSpPr>
-        <p:spPr>
-          <a:xfrm>
-            <a:off x="548640" y="1554480"/>
-            <a:ext cx="7955280" cy="3108960"/>
-          </a:xfrm>
-          <a:prstGeom prst="rect">
-            <a:avLst/>
-          </a:prstGeom>
-          <a:noFill/>
-          <a:ln/>
-        </p:spPr>
-        <p:txBody>
-          <a:bodyPr wrap="square" lIns="0" tIns="0" rIns="0" bIns="0" rtlCol="0" anchor="t"/>
-          <a:lstStyle/>
-          <a:p>
-            <a:pPr marL="152400" indent="-152400">
-              <a:spcAft>
-                <a:spcPts val="1200"/>
-              </a:spcAft>
-              <a:buSzPct val="100000"/>
-              <a:buChar char="•"/>
-            </a:pPr>
-            <a:r>
-              <a:rPr lang="en-US" sz="1600" dirty="0">
-                <a:solidFill>
-                  <a:srgbClr val="2B2140"/>
-                </a:solidFill>
-                <a:latin typeface="Calibri" pitchFamily="34" charset="0"/>
-                <a:ea typeface="Calibri" pitchFamily="34" charset="-122"/>
-                <a:cs typeface="Calibri" pitchFamily="34" charset="-120"/>
-              </a:rPr>
-              <a:t>Mesh + star matches the physical WSN</a:t>
-            </a:r>
-            <a:endParaRPr lang="en-US" sz="1600" dirty="0"/>
-          </a:p>
-          <a:p>
-            <a:pPr marL="152400" indent="-152400">
-              <a:spcAft>
-                <a:spcPts val="1200"/>
-              </a:spcAft>
-              <a:buSzPct val="100000"/>
-              <a:buChar char="•"/>
-            </a:pPr>
-            <a:r>
-              <a:rPr lang="en-US" sz="1600" dirty="0">
-                <a:solidFill>
-                  <a:srgbClr val="2B2140"/>
-                </a:solidFill>
-                <a:latin typeface="Calibri" pitchFamily="34" charset="0"/>
-                <a:ea typeface="Calibri" pitchFamily="34" charset="-122"/>
-                <a:cs typeface="Calibri" pitchFamily="34" charset="-120"/>
-              </a:rPr>
-              <a:t>MPI between machines + threads within: both parallelism models</a:t>
-            </a:r>
-            <a:endParaRPr lang="en-US" sz="1600" dirty="0"/>
-          </a:p>
-          <a:p>
-            <a:pPr marL="152400" indent="-152400">
-              <a:spcAft>
-                <a:spcPts val="1200"/>
-              </a:spcAft>
-              <a:buSzPct val="100000"/>
-              <a:buChar char="•"/>
-            </a:pPr>
-            <a:r>
-              <a:rPr lang="en-US" sz="1600" dirty="0">
-                <a:solidFill>
-                  <a:srgbClr val="2B2140"/>
-                </a:solidFill>
-                <a:latin typeface="Calibri" pitchFamily="34" charset="0"/>
-                <a:ea typeface="Calibri" pitchFamily="34" charset="-122"/>
-                <a:cs typeface="Calibri" pitchFamily="34" charset="-120"/>
-              </a:rPr>
-              <a:t>Bottleneck: base-station link; relieved, not removed, by more stations</a:t>
-            </a:r>
-            <a:endParaRPr lang="en-US" sz="1600" dirty="0"/>
-          </a:p>
-          <a:p>
-            <a:pPr marL="152400" indent="-152400">
-              <a:spcAft>
-                <a:spcPts val="1200"/>
-              </a:spcAft>
-              <a:buSzPct val="100000"/>
-              <a:buChar char="•"/>
-            </a:pPr>
-            <a:r>
-              <a:rPr lang="en-US" sz="1600" dirty="0">
-                <a:solidFill>
-                  <a:srgbClr val="2B2140"/>
-                </a:solidFill>
-                <a:latin typeface="Calibri" pitchFamily="34" charset="0"/>
-                <a:ea typeface="Calibri" pitchFamily="34" charset="-122"/>
-                <a:cs typeface="Calibri" pitchFamily="34" charset="-120"/>
-              </a:rPr>
-              <a:t>Limits: MPI assumes reliable links; central BS = single point of failure</a:t>
-            </a:r>
-            <a:endParaRPr lang="en-US" sz="1600" dirty="0"/>
-          </a:p>
-          <a:p>
-            <a:pPr marL="152400" indent="-152400">
-              <a:spcAft>
-                <a:spcPts val="1200"/>
-              </a:spcAft>
-              <a:buSzPct val="100000"/>
-              <a:buChar char="•"/>
-            </a:pPr>
-            <a:r>
-              <a:rPr lang="en-US" sz="1600" dirty="0">
-                <a:solidFill>
-                  <a:srgbClr val="2B2140"/>
-                </a:solidFill>
-                <a:latin typeface="Calibri" pitchFamily="34" charset="0"/>
-                <a:ea typeface="Calibri" pitchFamily="34" charset="-122"/>
-                <a:cs typeface="Calibri" pitchFamily="34" charset="-120"/>
-              </a:rPr>
-              <a:t>Future: fault injection, replicated base stations, real EV data</a:t>
-            </a:r>
-            <a:endParaRPr lang="en-US" sz="1600" dirty="0"/>
-          </a:p>
-        </p:txBody>
-      </p:sp>
-    </p:spTree>
-  </p:cSld>
-  <p:clrMapOvr>
-    <a:masterClrMapping/>
-  </p:clrMapOvr>
-</p:sld>
-</file>
-
-<file path=ppt/slides/slide12.xml><?xml version="1.0" encoding="utf-8"?>
-<p:sld xmlns:a="http://schemas.openxmlformats.org/drawingml/2006/main" xmlns:r="http://schemas.openxmlformats.org/officeDocument/2006/relationships" xmlns:p="http://schemas.openxmlformats.org/presentationml/2006/main">
-  <p:cSld name="Slide 12">
-    <p:bg>
-      <p:bgPr>
-        <a:solidFill>
-          <a:srgbClr val="5B2D8E"/>
-        </a:solidFill>
-      </p:bgPr>
-    </p:bg>
-    <p:spTree>
-      <p:nvGrpSpPr>
-        <p:cNvPr id="1" name=""/>
-        <p:cNvGrpSpPr/>
-        <p:nvPr/>
-      </p:nvGrpSpPr>
-      <p:grpSpPr>
-        <a:xfrm>
-          <a:off x="0" y="0"/>
-          <a:ext cx="0" cy="0"/>
-          <a:chOff x="0" y="0"/>
-          <a:chExt cx="0" cy="0"/>
-        </a:xfrm>
-      </p:grpSpPr>
-      <p:sp>
-        <p:nvSpPr>
-          <p:cNvPr id="2" name="Text 0"/>
-          <p:cNvSpPr/>
-          <p:nvPr/>
-        </p:nvSpPr>
-        <p:spPr>
-          <a:xfrm>
-            <a:off x="548640" y="2011680"/>
-            <a:ext cx="8046720" cy="914400"/>
-          </a:xfrm>
-          <a:prstGeom prst="rect">
-            <a:avLst/>
-          </a:prstGeom>
-          <a:noFill/>
-          <a:ln/>
-        </p:spPr>
-        <p:txBody>
-          <a:bodyPr wrap="square" lIns="0" tIns="0" rIns="0" bIns="0" rtlCol="0" anchor="ctr"/>
-          <a:lstStyle/>
-          <a:p>
-            <a:pPr algn="ctr" indent="0" marL="0">
-              <a:buNone/>
-            </a:pPr>
-            <a:r>
-              <a:rPr lang="en-US" sz="4800" b="1" dirty="0">
-                <a:solidFill>
-                  <a:srgbClr val="FFFFFF"/>
-                </a:solidFill>
-                <a:latin typeface="Calibri" pitchFamily="34" charset="0"/>
-                <a:ea typeface="Calibri" pitchFamily="34" charset="-122"/>
-                <a:cs typeface="Calibri" pitchFamily="34" charset="-120"/>
-              </a:rPr>
-              <a:t>Questions?</a:t>
-            </a:r>
-            <a:endParaRPr lang="en-US" sz="4800" dirty="0"/>
-          </a:p>
-        </p:txBody>
-      </p:sp>
-      <p:sp>
-        <p:nvSpPr>
-          <p:cNvPr id="3" name="Text 1"/>
-          <p:cNvSpPr/>
-          <p:nvPr/>
-        </p:nvSpPr>
-        <p:spPr>
-          <a:xfrm>
-            <a:off x="548640" y="4297680"/>
-            <a:ext cx="8046720" cy="365760"/>
-          </a:xfrm>
-          <a:prstGeom prst="rect">
-            <a:avLst/>
-          </a:prstGeom>
-          <a:noFill/>
-          <a:ln/>
-        </p:spPr>
-        <p:txBody>
-          <a:bodyPr wrap="square" lIns="0" tIns="0" rIns="0" bIns="0" rtlCol="0" anchor="ctr"/>
-          <a:lstStyle/>
-          <a:p>
-            <a:pPr algn="ctr" indent="0" marL="0">
-              <a:buNone/>
-            </a:pPr>
-            <a:r>
-              <a:rPr lang="en-US" sz="1300" dirty="0">
-                <a:solidFill>
-                  <a:srgbClr val="D9CBEF"/>
-                </a:solidFill>
-                <a:latin typeface="Calibri" pitchFamily="34" charset="0"/>
-                <a:ea typeface="Calibri" pitchFamily="34" charset="-122"/>
-                <a:cs typeface="Calibri" pitchFamily="34" charset="-120"/>
-              </a:rPr>
-              <a:t>Appendix slides follow, clearly labelled</a:t>
-            </a:r>
-            <a:endParaRPr lang="en-US" sz="1300" dirty="0"/>
-          </a:p>
-        </p:txBody>
-      </p:sp>
-    </p:spTree>
-  </p:cSld>
-  <p:clrMapOvr>
-    <a:masterClrMapping/>
-  </p:clrMapOvr>
-</p:sld>
-</file>
-
-<file path=ppt/slides/slide13.xml><?xml version="1.0" encoding="utf-8"?>
-<p:sld xmlns:a="http://schemas.openxmlformats.org/drawingml/2006/main" xmlns:r="http://schemas.openxmlformats.org/officeDocument/2006/relationships" xmlns:p="http://schemas.openxmlformats.org/presentationml/2006/main">
-  <p:cSld name="Slide 13">
-    <p:bg>
-      <p:bgPr>
-        <a:solidFill>
-          <a:srgbClr val="FFFFFF"/>
-        </a:solidFill>
-      </p:bgPr>
-    </p:bg>
-    <p:spTree>
-      <p:nvGrpSpPr>
-        <p:cNvPr id="1" name=""/>
-        <p:cNvGrpSpPr/>
-        <p:nvPr/>
-      </p:nvGrpSpPr>
-      <p:grpSpPr>
-        <a:xfrm>
-          <a:off x="0" y="0"/>
-          <a:ext cx="0" cy="0"/>
-          <a:chOff x="0" y="0"/>
-          <a:chExt cx="0" cy="0"/>
-        </a:xfrm>
-      </p:grpSpPr>
-      <p:sp>
-        <p:nvSpPr>
-          <p:cNvPr id="2" name="Text 0"/>
-          <p:cNvSpPr/>
-          <p:nvPr/>
-        </p:nvSpPr>
-        <p:spPr>
-          <a:xfrm>
-            <a:off x="548640" y="2194560"/>
-            <a:ext cx="8046720" cy="731520"/>
-          </a:xfrm>
-          <a:prstGeom prst="rect">
-            <a:avLst/>
-          </a:prstGeom>
-          <a:noFill/>
-          <a:ln/>
-        </p:spPr>
-        <p:txBody>
-          <a:bodyPr wrap="square" lIns="0" tIns="0" rIns="0" bIns="0" rtlCol="0" anchor="ctr"/>
-          <a:lstStyle/>
-          <a:p>
-            <a:pPr algn="ctr" indent="0" marL="0">
-              <a:buNone/>
-            </a:pPr>
-            <a:r>
-              <a:rPr lang="en-US" sz="3600" b="1" spc="600" kern="0" dirty="0">
-                <a:solidFill>
-                  <a:srgbClr val="7C4DBE"/>
-                </a:solidFill>
-                <a:latin typeface="Calibri" pitchFamily="34" charset="0"/>
-                <a:ea typeface="Calibri" pitchFamily="34" charset="-122"/>
-                <a:cs typeface="Calibri" pitchFamily="34" charset="-120"/>
-              </a:rPr>
-              <a:t>APPENDIX</a:t>
-            </a:r>
-            <a:endParaRPr lang="en-US" sz="3600" dirty="0"/>
-          </a:p>
-        </p:txBody>
-      </p:sp>
-      <p:sp>
-        <p:nvSpPr>
-          <p:cNvPr id="3" name="Text 1"/>
-          <p:cNvSpPr/>
-          <p:nvPr/>
-        </p:nvSpPr>
-        <p:spPr>
-          <a:xfrm>
-            <a:off x="548640" y="3017520"/>
-            <a:ext cx="8046720" cy="365760"/>
-          </a:xfrm>
-          <a:prstGeom prst="rect">
-            <a:avLst/>
-          </a:prstGeom>
-          <a:noFill/>
-          <a:ln/>
-        </p:spPr>
-        <p:txBody>
-          <a:bodyPr wrap="square" lIns="0" tIns="0" rIns="0" bIns="0" rtlCol="0" anchor="ctr"/>
-          <a:lstStyle/>
-          <a:p>
-            <a:pPr algn="ctr" indent="0" marL="0">
-              <a:buNone/>
-            </a:pPr>
-            <a:r>
-              <a:rPr lang="en-US" sz="1400" dirty="0">
-                <a:solidFill>
-                  <a:srgbClr val="6B6478"/>
-                </a:solidFill>
-                <a:latin typeface="Calibri" pitchFamily="34" charset="0"/>
-                <a:ea typeface="Calibri" pitchFamily="34" charset="-122"/>
-                <a:cs typeface="Calibri" pitchFamily="34" charset="-120"/>
-              </a:rPr>
-              <a:t>Extra material: full topology working, delay calculations, code skeleton</a:t>
             </a:r>
             <a:endParaRPr lang="en-US" sz="1400" dirty="0"/>
           </a:p>
@@ -8618,89 +6861,30 @@
           </a:p>
         </p:txBody>
       </p:sp>
-      <p:sp>
-        <p:nvSpPr>
-          <p:cNvPr id="20" name="Shape 18"/>
-          <p:cNvSpPr/>
-          <p:nvPr/>
-        </p:nvSpPr>
-        <p:spPr>
-          <a:xfrm>
-            <a:off x="5029200" y="1508760"/>
-            <a:ext cx="3566160" cy="3017520"/>
-          </a:xfrm>
-          <a:prstGeom prst="roundRect">
-            <a:avLst>
-              <a:gd name="adj" fmla="val 2424"/>
-            </a:avLst>
-          </a:prstGeom>
-          <a:solidFill>
-            <a:srgbClr val="EFE9F8"/>
-          </a:solidFill>
-          <a:ln w="12700">
-            <a:solidFill>
-              <a:srgbClr val="D9CBEF"/>
-            </a:solidFill>
-            <a:prstDash val="solid"/>
-          </a:ln>
-        </p:spPr>
-      </p:sp>
-      <p:sp>
-        <p:nvSpPr>
-          <p:cNvPr id="21" name="Text 19"/>
-          <p:cNvSpPr/>
-          <p:nvPr/>
-        </p:nvSpPr>
-        <p:spPr>
-          <a:xfrm>
-            <a:off x="5029200" y="1508760"/>
-            <a:ext cx="3566160" cy="3017520"/>
+      <p:pic>
+        <p:nvPicPr>
+          <p:cNvPr id="20" name="Image 0" descr="/Users/erwynasoo/Desktop/Obsidian Vault/FIT3143_Parallel_Computing/01_Weekly_Materials/Week_06/Applied_1/wsn_class_diagram.png">    </p:cNvPr>
+          <p:cNvPicPr>
+            <a:picLocks noChangeAspect="1"/>
+          </p:cNvPicPr>
+          <p:nvPr/>
+        </p:nvPicPr>
+        <p:blipFill>
+          <a:blip r:embed="rId1"/>
+          <a:stretch>
+            <a:fillRect/>
+          </a:stretch>
+        </p:blipFill>
+        <p:spPr>
+          <a:xfrm>
+            <a:off x="4892040" y="1463040"/>
+            <a:ext cx="3794760" cy="3154680"/>
           </a:xfrm>
           <a:prstGeom prst="rect">
             <a:avLst/>
           </a:prstGeom>
-          <a:noFill/>
-          <a:ln/>
-        </p:spPr>
-        <p:txBody>
-          <a:bodyPr wrap="square" rtlCol="0" anchor="ctr"/>
-          <a:lstStyle/>
-          <a:p>
-            <a:pPr algn="ctr" indent="0" marL="0">
-              <a:buNone/>
-            </a:pPr>
-            <a:r>
-              <a:rPr lang="en-US" sz="1300" i="1" dirty="0">
-                <a:solidFill>
-                  <a:srgbClr val="7C4DBE"/>
-                </a:solidFill>
-                <a:latin typeface="Calibri" pitchFamily="34" charset="0"/>
-                <a:ea typeface="Calibri" pitchFamily="34" charset="-122"/>
-                <a:cs typeface="Calibri" pitchFamily="34" charset="-120"/>
-              </a:rPr>
-              <a:t>Class diagram</a:t>
-            </a:r>
-            <a:endParaRPr lang="en-US" sz="1300" dirty="0"/>
-          </a:p>
-          <a:p>
-            <a:pPr algn="ctr" indent="0" marL="0">
-              <a:buNone/>
-            </a:pPr>
-            <a:r>
-              <a:rPr lang="en-US" sz="1300" i="1" dirty="0">
-                <a:solidFill>
-                  <a:srgbClr val="7C4DBE"/>
-                </a:solidFill>
-                <a:latin typeface="Calibri" pitchFamily="34" charset="0"/>
-                <a:ea typeface="Calibri" pitchFamily="34" charset="-122"/>
-                <a:cs typeface="Calibri" pitchFamily="34" charset="-120"/>
-              </a:rPr>
-              <a:t>(insert from draw.io)</a:t>
-            </a:r>
-            <a:endParaRPr lang="en-US" sz="1300" dirty="0"/>
-          </a:p>
-        </p:txBody>
-      </p:sp>
+        </p:spPr>
+      </p:pic>
     </p:spTree>
   </p:cSld>
   <p:clrMapOvr>
@@ -9249,7 +7433,7 @@
     <p:bg>
       <p:bgPr>
         <a:solidFill>
-          <a:srgbClr val="FFFFFF"/>
+          <a:srgbClr val="5B2D8E"/>
         </a:solidFill>
       </p:bgPr>
     </p:bg>
@@ -9275,8 +7459,8 @@
         </p:nvSpPr>
         <p:spPr>
           <a:xfrm>
-            <a:off x="548640" y="292608"/>
-            <a:ext cx="5943600" cy="274320"/>
+            <a:off x="548640" y="2011680"/>
+            <a:ext cx="8046720" cy="914400"/>
           </a:xfrm>
           <a:prstGeom prst="rect">
             <a:avLst/>
@@ -9286,1768 +7470,60 @@
         </p:spPr>
         <p:txBody>
           <a:bodyPr wrap="square" lIns="0" tIns="0" rIns="0" bIns="0" rtlCol="0" anchor="ctr"/>
-          <a:lstStyle/>
-          <a:p>
-            <a:pPr indent="0" marL="0">
-              <a:buNone/>
-            </a:pPr>
-            <a:r>
-              <a:rPr lang="en-US" sz="1200" b="1" spc="200" kern="0" dirty="0">
-                <a:solidFill>
-                  <a:srgbClr val="7C4DBE"/>
-                </a:solidFill>
-                <a:latin typeface="Calibri" pitchFamily="34" charset="0"/>
-                <a:ea typeface="Calibri" pitchFamily="34" charset="-122"/>
-                <a:cs typeface="Calibri" pitchFamily="34" charset="-120"/>
-              </a:rPr>
-              <a:t>TASK 2</a:t>
-            </a:r>
-            <a:endParaRPr lang="en-US" sz="1200" dirty="0"/>
-          </a:p>
-        </p:txBody>
-      </p:sp>
-      <p:sp>
-        <p:nvSpPr>
-          <p:cNvPr id="3" name="Text 1"/>
-          <p:cNvSpPr/>
-          <p:nvPr/>
-        </p:nvSpPr>
-        <p:spPr>
-          <a:xfrm>
-            <a:off x="548640" y="548640"/>
-            <a:ext cx="8046720" cy="685800"/>
-          </a:xfrm>
-          <a:prstGeom prst="rect">
-            <a:avLst/>
-          </a:prstGeom>
-          <a:noFill/>
-          <a:ln/>
-        </p:spPr>
-        <p:txBody>
-          <a:bodyPr wrap="square" lIns="0" tIns="0" rIns="0" bIns="0" rtlCol="0" anchor="ctr"/>
-          <a:lstStyle/>
-          <a:p>
-            <a:pPr indent="0" marL="0">
-              <a:buNone/>
-            </a:pPr>
-            <a:r>
-              <a:rPr lang="en-US" sz="3000" b="1" dirty="0">
-                <a:solidFill>
-                  <a:srgbClr val="5B2D8E"/>
-                </a:solidFill>
-                <a:latin typeface="Calibri" pitchFamily="34" charset="0"/>
-                <a:ea typeface="Calibri" pitchFamily="34" charset="-122"/>
-                <a:cs typeface="Calibri" pitchFamily="34" charset="-120"/>
-              </a:rPr>
-              <a:t>Message passing design</a:t>
-            </a:r>
-            <a:endParaRPr lang="en-US" sz="3000" dirty="0"/>
-          </a:p>
-        </p:txBody>
-      </p:sp>
-      <p:sp>
-        <p:nvSpPr>
-          <p:cNvPr id="4" name="Shape 2"/>
-          <p:cNvSpPr/>
-          <p:nvPr/>
-        </p:nvSpPr>
-        <p:spPr>
-          <a:xfrm>
-            <a:off x="8275320" y="384048"/>
-            <a:ext cx="384048" cy="0"/>
-          </a:xfrm>
-          <a:prstGeom prst="line">
-            <a:avLst/>
-          </a:prstGeom>
-          <a:noFill/>
-          <a:ln w="12700">
-            <a:solidFill>
-              <a:srgbClr val="D9CBEF"/>
-            </a:solidFill>
-            <a:prstDash val="solid"/>
-          </a:ln>
-        </p:spPr>
-      </p:sp>
-      <p:sp>
-        <p:nvSpPr>
-          <p:cNvPr id="5" name="Shape 3"/>
-          <p:cNvSpPr/>
-          <p:nvPr/>
-        </p:nvSpPr>
-        <p:spPr>
-          <a:xfrm>
-            <a:off x="8275320" y="384048"/>
-            <a:ext cx="0" cy="384048"/>
-          </a:xfrm>
-          <a:prstGeom prst="line">
-            <a:avLst/>
-          </a:prstGeom>
-          <a:noFill/>
-          <a:ln w="12700">
-            <a:solidFill>
-              <a:srgbClr val="D9CBEF"/>
-            </a:solidFill>
-            <a:prstDash val="solid"/>
-          </a:ln>
-        </p:spPr>
-      </p:sp>
-      <p:sp>
-        <p:nvSpPr>
-          <p:cNvPr id="6" name="Shape 4"/>
-          <p:cNvSpPr/>
-          <p:nvPr/>
-        </p:nvSpPr>
-        <p:spPr>
-          <a:xfrm>
-            <a:off x="8275320" y="576072"/>
-            <a:ext cx="384048" cy="0"/>
-          </a:xfrm>
-          <a:prstGeom prst="line">
-            <a:avLst/>
-          </a:prstGeom>
-          <a:noFill/>
-          <a:ln w="12700">
-            <a:solidFill>
-              <a:srgbClr val="D9CBEF"/>
-            </a:solidFill>
-            <a:prstDash val="solid"/>
-          </a:ln>
-        </p:spPr>
-      </p:sp>
-      <p:sp>
-        <p:nvSpPr>
-          <p:cNvPr id="7" name="Shape 5"/>
-          <p:cNvSpPr/>
-          <p:nvPr/>
-        </p:nvSpPr>
-        <p:spPr>
-          <a:xfrm>
-            <a:off x="8467344" y="384048"/>
-            <a:ext cx="0" cy="384048"/>
-          </a:xfrm>
-          <a:prstGeom prst="line">
-            <a:avLst/>
-          </a:prstGeom>
-          <a:noFill/>
-          <a:ln w="12700">
-            <a:solidFill>
-              <a:srgbClr val="D9CBEF"/>
-            </a:solidFill>
-            <a:prstDash val="solid"/>
-          </a:ln>
-        </p:spPr>
-      </p:sp>
-      <p:sp>
-        <p:nvSpPr>
-          <p:cNvPr id="8" name="Shape 6"/>
-          <p:cNvSpPr/>
-          <p:nvPr/>
-        </p:nvSpPr>
-        <p:spPr>
-          <a:xfrm>
-            <a:off x="8275320" y="768096"/>
-            <a:ext cx="384048" cy="0"/>
-          </a:xfrm>
-          <a:prstGeom prst="line">
-            <a:avLst/>
-          </a:prstGeom>
-          <a:noFill/>
-          <a:ln w="12700">
-            <a:solidFill>
-              <a:srgbClr val="D9CBEF"/>
-            </a:solidFill>
-            <a:prstDash val="solid"/>
-          </a:ln>
-        </p:spPr>
-      </p:sp>
-      <p:sp>
-        <p:nvSpPr>
-          <p:cNvPr id="9" name="Shape 7"/>
-          <p:cNvSpPr/>
-          <p:nvPr/>
-        </p:nvSpPr>
-        <p:spPr>
-          <a:xfrm>
-            <a:off x="8659368" y="384048"/>
-            <a:ext cx="0" cy="384048"/>
-          </a:xfrm>
-          <a:prstGeom prst="line">
-            <a:avLst/>
-          </a:prstGeom>
-          <a:noFill/>
-          <a:ln w="12700">
-            <a:solidFill>
-              <a:srgbClr val="D9CBEF"/>
-            </a:solidFill>
-            <a:prstDash val="solid"/>
-          </a:ln>
-        </p:spPr>
-      </p:sp>
-      <p:sp>
-        <p:nvSpPr>
-          <p:cNvPr id="10" name="Shape 8"/>
-          <p:cNvSpPr/>
-          <p:nvPr/>
-        </p:nvSpPr>
-        <p:spPr>
-          <a:xfrm>
-            <a:off x="8234172" y="342900"/>
-            <a:ext cx="82296" cy="82296"/>
-          </a:xfrm>
-          <a:prstGeom prst="ellipse">
-            <a:avLst/>
-          </a:prstGeom>
-          <a:solidFill>
-            <a:srgbClr val="7C4DBE"/>
-          </a:solidFill>
-          <a:ln/>
-        </p:spPr>
-      </p:sp>
-      <p:sp>
-        <p:nvSpPr>
-          <p:cNvPr id="11" name="Shape 9"/>
-          <p:cNvSpPr/>
-          <p:nvPr/>
-        </p:nvSpPr>
-        <p:spPr>
-          <a:xfrm>
-            <a:off x="8234172" y="534924"/>
-            <a:ext cx="82296" cy="82296"/>
-          </a:xfrm>
-          <a:prstGeom prst="ellipse">
-            <a:avLst/>
-          </a:prstGeom>
-          <a:solidFill>
-            <a:srgbClr val="7C4DBE"/>
-          </a:solidFill>
-          <a:ln/>
-        </p:spPr>
-      </p:sp>
-      <p:sp>
-        <p:nvSpPr>
-          <p:cNvPr id="12" name="Shape 10"/>
-          <p:cNvSpPr/>
-          <p:nvPr/>
-        </p:nvSpPr>
-        <p:spPr>
-          <a:xfrm>
-            <a:off x="8234172" y="726948"/>
-            <a:ext cx="82296" cy="82296"/>
-          </a:xfrm>
-          <a:prstGeom prst="ellipse">
-            <a:avLst/>
-          </a:prstGeom>
-          <a:solidFill>
-            <a:srgbClr val="7C4DBE"/>
-          </a:solidFill>
-          <a:ln/>
-        </p:spPr>
-      </p:sp>
-      <p:sp>
-        <p:nvSpPr>
-          <p:cNvPr id="13" name="Shape 11"/>
-          <p:cNvSpPr/>
-          <p:nvPr/>
-        </p:nvSpPr>
-        <p:spPr>
-          <a:xfrm>
-            <a:off x="8426196" y="342900"/>
-            <a:ext cx="82296" cy="82296"/>
-          </a:xfrm>
-          <a:prstGeom prst="ellipse">
-            <a:avLst/>
-          </a:prstGeom>
-          <a:solidFill>
-            <a:srgbClr val="7C4DBE"/>
-          </a:solidFill>
-          <a:ln/>
-        </p:spPr>
-      </p:sp>
-      <p:sp>
-        <p:nvSpPr>
-          <p:cNvPr id="14" name="Shape 12"/>
-          <p:cNvSpPr/>
-          <p:nvPr/>
-        </p:nvSpPr>
-        <p:spPr>
-          <a:xfrm>
-            <a:off x="8426196" y="534924"/>
-            <a:ext cx="82296" cy="82296"/>
-          </a:xfrm>
-          <a:prstGeom prst="ellipse">
-            <a:avLst/>
-          </a:prstGeom>
-          <a:solidFill>
-            <a:srgbClr val="5B2D8E"/>
-          </a:solidFill>
-          <a:ln/>
-        </p:spPr>
-      </p:sp>
-      <p:sp>
-        <p:nvSpPr>
-          <p:cNvPr id="15" name="Shape 13"/>
-          <p:cNvSpPr/>
-          <p:nvPr/>
-        </p:nvSpPr>
-        <p:spPr>
-          <a:xfrm>
-            <a:off x="8426196" y="726948"/>
-            <a:ext cx="82296" cy="82296"/>
-          </a:xfrm>
-          <a:prstGeom prst="ellipse">
-            <a:avLst/>
-          </a:prstGeom>
-          <a:solidFill>
-            <a:srgbClr val="7C4DBE"/>
-          </a:solidFill>
-          <a:ln/>
-        </p:spPr>
-      </p:sp>
-      <p:sp>
-        <p:nvSpPr>
-          <p:cNvPr id="16" name="Shape 14"/>
-          <p:cNvSpPr/>
-          <p:nvPr/>
-        </p:nvSpPr>
-        <p:spPr>
-          <a:xfrm>
-            <a:off x="8618220" y="342900"/>
-            <a:ext cx="82296" cy="82296"/>
-          </a:xfrm>
-          <a:prstGeom prst="ellipse">
-            <a:avLst/>
-          </a:prstGeom>
-          <a:solidFill>
-            <a:srgbClr val="7C4DBE"/>
-          </a:solidFill>
-          <a:ln/>
-        </p:spPr>
-      </p:sp>
-      <p:sp>
-        <p:nvSpPr>
-          <p:cNvPr id="17" name="Shape 15"/>
-          <p:cNvSpPr/>
-          <p:nvPr/>
-        </p:nvSpPr>
-        <p:spPr>
-          <a:xfrm>
-            <a:off x="8618220" y="534924"/>
-            <a:ext cx="82296" cy="82296"/>
-          </a:xfrm>
-          <a:prstGeom prst="ellipse">
-            <a:avLst/>
-          </a:prstGeom>
-          <a:solidFill>
-            <a:srgbClr val="7C4DBE"/>
-          </a:solidFill>
-          <a:ln/>
-        </p:spPr>
-      </p:sp>
-      <p:sp>
-        <p:nvSpPr>
-          <p:cNvPr id="18" name="Shape 16"/>
-          <p:cNvSpPr/>
-          <p:nvPr/>
-        </p:nvSpPr>
-        <p:spPr>
-          <a:xfrm>
-            <a:off x="8618220" y="726948"/>
-            <a:ext cx="82296" cy="82296"/>
-          </a:xfrm>
-          <a:prstGeom prst="ellipse">
-            <a:avLst/>
-          </a:prstGeom>
-          <a:solidFill>
-            <a:srgbClr val="7C4DBE"/>
-          </a:solidFill>
-          <a:ln/>
-        </p:spPr>
-      </p:sp>
-      <p:graphicFrame>
-        <p:nvGraphicFramePr>
-          <p:cNvPr id="8" name="Table 0"/>
-          <p:cNvGraphicFramePr>
-            <a:graphicFrameLocks noGrp="1"/>
-          </p:cNvGraphicFramePr>
-          <p:nvPr>
-            <p:extLst>
-              <p:ext uri="{D42A27DB-BD31-4B8C-83A1-F6EECF244321}">
-                <p14:modId xmlns:p14="http://schemas.microsoft.com/office/powerpoint/2010/main" val="1579011935"/>
-              </p:ext>
-            </p:extLst>
-          </p:nvPr>
-        </p:nvGraphicFramePr>
-        <p:xfrm>
-          <a:off x="548640" y="1371600"/>
-          <a:ext cx="4937760" cy="914400"/>
-        </p:xfrm>
-        <a:graphic>
-          <a:graphicData uri="http://schemas.openxmlformats.org/drawingml/2006/table">
-            <a:tbl>
-              <a:tblPr/>
-              <a:tblGrid>
-                <a:gridCol w="1737360"/>
-                <a:gridCol w="1645920"/>
-                <a:gridCol w="1554480"/>
-              </a:tblGrid>
-              <a:tr h="292608">
-                <a:tc>
-                  <a:txBody>
-                    <a:bodyPr/>
-                    <a:lstStyle/>
-                    <a:p>
-                      <a:pPr indent="0" marL="0">
-                        <a:buNone/>
-                      </a:pPr>
-                      <a:r>
-                        <a:rPr lang="en-US" sz="1100" b="1" dirty="0">
-                          <a:solidFill>
-                            <a:srgbClr val="FFFFFF"/>
-                          </a:solidFill>
-                          <a:latin typeface="Calibri" pitchFamily="34" charset="0"/>
-                          <a:ea typeface="Calibri" pitchFamily="34" charset="-122"/>
-                          <a:cs typeface="Calibri" pitchFamily="34" charset="-120"/>
-                        </a:rPr>
-                        <a:t>Message</a:t>
-                      </a:r>
-                      <a:endParaRPr lang="en-US" sz="1100" dirty="0">
-                        <a:latin typeface="Calibri" charset="0"/>
-                        <a:ea typeface="Calibri" charset="0"/>
-                        <a:cs typeface="Calibri" charset="0"/>
-                      </a:endParaRPr>
-                    </a:p>
-                  </a:txBody>
-                  <a:tcPr marL="36576" marR="36576" marT="36576" marB="36576" anchor="ctr">
-                    <a:lnL w="6350" cap="flat" cmpd="sng" algn="ctr">
-                      <a:solidFill>
-                        <a:srgbClr val="D9CBEF"/>
-                      </a:solidFill>
-                      <a:prstDash val="solid"/>
-                      <a:round/>
-                      <a:headEnd type="none" w="med" len="med"/>
-                      <a:tailEnd type="none" w="med" len="med"/>
-                    </a:lnL>
-                    <a:lnR w="6350" cap="flat" cmpd="sng" algn="ctr">
-                      <a:solidFill>
-                        <a:srgbClr val="D9CBEF"/>
-                      </a:solidFill>
-                      <a:prstDash val="solid"/>
-                      <a:round/>
-                      <a:headEnd type="none" w="med" len="med"/>
-                      <a:tailEnd type="none" w="med" len="med"/>
-                    </a:lnR>
-                    <a:lnT w="6350" cap="flat" cmpd="sng" algn="ctr">
-                      <a:solidFill>
-                        <a:srgbClr val="D9CBEF"/>
-                      </a:solidFill>
-                      <a:prstDash val="solid"/>
-                      <a:round/>
-                      <a:headEnd type="none" w="med" len="med"/>
-                      <a:tailEnd type="none" w="med" len="med"/>
-                    </a:lnT>
-                    <a:lnB w="6350" cap="flat" cmpd="sng" algn="ctr">
-                      <a:solidFill>
-                        <a:srgbClr val="D9CBEF"/>
-                      </a:solidFill>
-                      <a:prstDash val="solid"/>
-                      <a:round/>
-                      <a:headEnd type="none" w="med" len="med"/>
-                      <a:tailEnd type="none" w="med" len="med"/>
-                    </a:lnB>
-                    <a:solidFill>
-                      <a:srgbClr val="5B2D8E"/>
-                    </a:solidFill>
-                  </a:tcPr>
-                </a:tc>
-                <a:tc>
-                  <a:txBody>
-                    <a:bodyPr/>
-                    <a:lstStyle/>
-                    <a:p>
-                      <a:pPr indent="0" marL="0">
-                        <a:buNone/>
-                      </a:pPr>
-                      <a:r>
-                        <a:rPr lang="en-US" sz="1100" b="1" dirty="0">
-                          <a:solidFill>
-                            <a:srgbClr val="FFFFFF"/>
-                          </a:solidFill>
-                          <a:latin typeface="Calibri" pitchFamily="34" charset="0"/>
-                          <a:ea typeface="Calibri" pitchFamily="34" charset="-122"/>
-                          <a:cs typeface="Calibri" pitchFamily="34" charset="-120"/>
-                        </a:rPr>
-                        <a:t>Route</a:t>
-                      </a:r>
-                      <a:endParaRPr lang="en-US" sz="1100" dirty="0">
-                        <a:latin typeface="Calibri" charset="0"/>
-                        <a:ea typeface="Calibri" charset="0"/>
-                        <a:cs typeface="Calibri" charset="0"/>
-                      </a:endParaRPr>
-                    </a:p>
-                  </a:txBody>
-                  <a:tcPr marL="36576" marR="36576" marT="36576" marB="36576" anchor="ctr">
-                    <a:lnL w="6350" cap="flat" cmpd="sng" algn="ctr">
-                      <a:solidFill>
-                        <a:srgbClr val="D9CBEF"/>
-                      </a:solidFill>
-                      <a:prstDash val="solid"/>
-                      <a:round/>
-                      <a:headEnd type="none" w="med" len="med"/>
-                      <a:tailEnd type="none" w="med" len="med"/>
-                    </a:lnL>
-                    <a:lnR w="6350" cap="flat" cmpd="sng" algn="ctr">
-                      <a:solidFill>
-                        <a:srgbClr val="D9CBEF"/>
-                      </a:solidFill>
-                      <a:prstDash val="solid"/>
-                      <a:round/>
-                      <a:headEnd type="none" w="med" len="med"/>
-                      <a:tailEnd type="none" w="med" len="med"/>
-                    </a:lnR>
-                    <a:lnT w="6350" cap="flat" cmpd="sng" algn="ctr">
-                      <a:solidFill>
-                        <a:srgbClr val="D9CBEF"/>
-                      </a:solidFill>
-                      <a:prstDash val="solid"/>
-                      <a:round/>
-                      <a:headEnd type="none" w="med" len="med"/>
-                      <a:tailEnd type="none" w="med" len="med"/>
-                    </a:lnT>
-                    <a:lnB w="6350" cap="flat" cmpd="sng" algn="ctr">
-                      <a:solidFill>
-                        <a:srgbClr val="D9CBEF"/>
-                      </a:solidFill>
-                      <a:prstDash val="solid"/>
-                      <a:round/>
-                      <a:headEnd type="none" w="med" len="med"/>
-                      <a:tailEnd type="none" w="med" len="med"/>
-                    </a:lnB>
-                    <a:solidFill>
-                      <a:srgbClr val="5B2D8E"/>
-                    </a:solidFill>
-                  </a:tcPr>
-                </a:tc>
-                <a:tc>
-                  <a:txBody>
-                    <a:bodyPr/>
-                    <a:lstStyle/>
-                    <a:p>
-                      <a:pPr indent="0" marL="0">
-                        <a:buNone/>
-                      </a:pPr>
-                      <a:r>
-                        <a:rPr lang="en-US" sz="1100" b="1" dirty="0">
-                          <a:solidFill>
-                            <a:srgbClr val="FFFFFF"/>
-                          </a:solidFill>
-                          <a:latin typeface="Calibri" pitchFamily="34" charset="0"/>
-                          <a:ea typeface="Calibri" pitchFamily="34" charset="-122"/>
-                          <a:cs typeface="Calibri" pitchFamily="34" charset="-120"/>
-                        </a:rPr>
-                        <a:t>Mechanism</a:t>
-                      </a:r>
-                      <a:endParaRPr lang="en-US" sz="1100" dirty="0">
-                        <a:latin typeface="Calibri" charset="0"/>
-                        <a:ea typeface="Calibri" charset="0"/>
-                        <a:cs typeface="Calibri" charset="0"/>
-                      </a:endParaRPr>
-                    </a:p>
-                  </a:txBody>
-                  <a:tcPr marL="36576" marR="36576" marT="36576" marB="36576" anchor="ctr">
-                    <a:lnL w="6350" cap="flat" cmpd="sng" algn="ctr">
-                      <a:solidFill>
-                        <a:srgbClr val="D9CBEF"/>
-                      </a:solidFill>
-                      <a:prstDash val="solid"/>
-                      <a:round/>
-                      <a:headEnd type="none" w="med" len="med"/>
-                      <a:tailEnd type="none" w="med" len="med"/>
-                    </a:lnL>
-                    <a:lnR w="6350" cap="flat" cmpd="sng" algn="ctr">
-                      <a:solidFill>
-                        <a:srgbClr val="D9CBEF"/>
-                      </a:solidFill>
-                      <a:prstDash val="solid"/>
-                      <a:round/>
-                      <a:headEnd type="none" w="med" len="med"/>
-                      <a:tailEnd type="none" w="med" len="med"/>
-                    </a:lnR>
-                    <a:lnT w="6350" cap="flat" cmpd="sng" algn="ctr">
-                      <a:solidFill>
-                        <a:srgbClr val="D9CBEF"/>
-                      </a:solidFill>
-                      <a:prstDash val="solid"/>
-                      <a:round/>
-                      <a:headEnd type="none" w="med" len="med"/>
-                      <a:tailEnd type="none" w="med" len="med"/>
-                    </a:lnT>
-                    <a:lnB w="6350" cap="flat" cmpd="sng" algn="ctr">
-                      <a:solidFill>
-                        <a:srgbClr val="D9CBEF"/>
-                      </a:solidFill>
-                      <a:prstDash val="solid"/>
-                      <a:round/>
-                      <a:headEnd type="none" w="med" len="med"/>
-                      <a:tailEnd type="none" w="med" len="med"/>
-                    </a:lnB>
-                    <a:solidFill>
-                      <a:srgbClr val="5B2D8E"/>
-                    </a:solidFill>
-                  </a:tcPr>
-                </a:tc>
-              </a:tr>
-              <a:tr h="292608">
-                <a:tc>
-                  <a:txBody>
-                    <a:bodyPr/>
-                    <a:lstStyle/>
-                    <a:p>
-                      <a:pPr indent="0" marL="0">
-                        <a:buNone/>
-                      </a:pPr>
-                      <a:r>
-                        <a:rPr lang="en-US" sz="1050" dirty="0">
-                          <a:solidFill>
-                            <a:srgbClr val="2B2140"/>
-                          </a:solidFill>
-                          <a:latin typeface="Calibri" pitchFamily="34" charset="0"/>
-                          <a:ea typeface="Calibri" pitchFamily="34" charset="-122"/>
-                          <a:cs typeface="Calibri" pitchFamily="34" charset="-120"/>
-                        </a:rPr>
-                        <a:t>NEIGHBOUR_QUERY</a:t>
-                      </a:r>
-                      <a:endParaRPr lang="en-US" sz="1050" dirty="0">
-                        <a:latin typeface="Calibri" charset="0"/>
-                        <a:ea typeface="Calibri" charset="0"/>
-                        <a:cs typeface="Calibri" charset="0"/>
-                      </a:endParaRPr>
-                    </a:p>
-                  </a:txBody>
-                  <a:tcPr marL="36576" marR="36576" marT="36576" marB="36576" anchor="ctr">
-                    <a:lnL w="6350" cap="flat" cmpd="sng" algn="ctr">
-                      <a:solidFill>
-                        <a:srgbClr val="D9CBEF"/>
-                      </a:solidFill>
-                      <a:prstDash val="solid"/>
-                      <a:round/>
-                      <a:headEnd type="none" w="med" len="med"/>
-                      <a:tailEnd type="none" w="med" len="med"/>
-                    </a:lnL>
-                    <a:lnR w="6350" cap="flat" cmpd="sng" algn="ctr">
-                      <a:solidFill>
-                        <a:srgbClr val="D9CBEF"/>
-                      </a:solidFill>
-                      <a:prstDash val="solid"/>
-                      <a:round/>
-                      <a:headEnd type="none" w="med" len="med"/>
-                      <a:tailEnd type="none" w="med" len="med"/>
-                    </a:lnR>
-                    <a:lnT w="6350" cap="flat" cmpd="sng" algn="ctr">
-                      <a:solidFill>
-                        <a:srgbClr val="D9CBEF"/>
-                      </a:solidFill>
-                      <a:prstDash val="solid"/>
-                      <a:round/>
-                      <a:headEnd type="none" w="med" len="med"/>
-                      <a:tailEnd type="none" w="med" len="med"/>
-                    </a:lnT>
-                    <a:lnB w="6350" cap="flat" cmpd="sng" algn="ctr">
-                      <a:solidFill>
-                        <a:srgbClr val="D9CBEF"/>
-                      </a:solidFill>
-                      <a:prstDash val="solid"/>
-                      <a:round/>
-                      <a:headEnd type="none" w="med" len="med"/>
-                      <a:tailEnd type="none" w="med" len="med"/>
-                    </a:lnB>
-                    <a:solidFill>
-                      <a:srgbClr val="EFE9F8"/>
-                    </a:solidFill>
-                  </a:tcPr>
-                </a:tc>
-                <a:tc>
-                  <a:txBody>
-                    <a:bodyPr/>
-                    <a:lstStyle/>
-                    <a:p>
-                      <a:pPr indent="0" marL="0">
-                        <a:buNone/>
-                      </a:pPr>
-                      <a:r>
-                        <a:rPr lang="en-US" sz="1050" dirty="0">
-                          <a:solidFill>
-                            <a:srgbClr val="2B2140"/>
-                          </a:solidFill>
-                          <a:latin typeface="Calibri" pitchFamily="34" charset="0"/>
-                          <a:ea typeface="Calibri" pitchFamily="34" charset="-122"/>
-                          <a:cs typeface="Calibri" pitchFamily="34" charset="-120"/>
-                        </a:rPr>
-                        <a:t>node → 4 neighbours</a:t>
-                      </a:r>
-                      <a:endParaRPr lang="en-US" sz="1050" dirty="0">
-                        <a:latin typeface="Calibri" charset="0"/>
-                        <a:ea typeface="Calibri" charset="0"/>
-                        <a:cs typeface="Calibri" charset="0"/>
-                      </a:endParaRPr>
-                    </a:p>
-                  </a:txBody>
-                  <a:tcPr marL="36576" marR="36576" marT="36576" marB="36576" anchor="ctr">
-                    <a:lnL w="6350" cap="flat" cmpd="sng" algn="ctr">
-                      <a:solidFill>
-                        <a:srgbClr val="D9CBEF"/>
-                      </a:solidFill>
-                      <a:prstDash val="solid"/>
-                      <a:round/>
-                      <a:headEnd type="none" w="med" len="med"/>
-                      <a:tailEnd type="none" w="med" len="med"/>
-                    </a:lnL>
-                    <a:lnR w="6350" cap="flat" cmpd="sng" algn="ctr">
-                      <a:solidFill>
-                        <a:srgbClr val="D9CBEF"/>
-                      </a:solidFill>
-                      <a:prstDash val="solid"/>
-                      <a:round/>
-                      <a:headEnd type="none" w="med" len="med"/>
-                      <a:tailEnd type="none" w="med" len="med"/>
-                    </a:lnR>
-                    <a:lnT w="6350" cap="flat" cmpd="sng" algn="ctr">
-                      <a:solidFill>
-                        <a:srgbClr val="D9CBEF"/>
-                      </a:solidFill>
-                      <a:prstDash val="solid"/>
-                      <a:round/>
-                      <a:headEnd type="none" w="med" len="med"/>
-                      <a:tailEnd type="none" w="med" len="med"/>
-                    </a:lnT>
-                    <a:lnB w="6350" cap="flat" cmpd="sng" algn="ctr">
-                      <a:solidFill>
-                        <a:srgbClr val="D9CBEF"/>
-                      </a:solidFill>
-                      <a:prstDash val="solid"/>
-                      <a:round/>
-                      <a:headEnd type="none" w="med" len="med"/>
-                      <a:tailEnd type="none" w="med" len="med"/>
-                    </a:lnB>
-                    <a:solidFill>
-                      <a:srgbClr val="EFE9F8"/>
-                    </a:solidFill>
-                  </a:tcPr>
-                </a:tc>
-                <a:tc>
-                  <a:txBody>
-                    <a:bodyPr/>
-                    <a:lstStyle/>
-                    <a:p>
-                      <a:pPr indent="0" marL="0">
-                        <a:buNone/>
-                      </a:pPr>
-                      <a:r>
-                        <a:rPr lang="en-US" sz="1050" dirty="0">
-                          <a:solidFill>
-                            <a:srgbClr val="2B2140"/>
-                          </a:solidFill>
-                          <a:latin typeface="Calibri" pitchFamily="34" charset="0"/>
-                          <a:ea typeface="Calibri" pitchFamily="34" charset="-122"/>
-                          <a:cs typeface="Calibri" pitchFamily="34" charset="-120"/>
-                        </a:rPr>
-                        <a:t>MPI_Isend (non-blocking)</a:t>
-                      </a:r>
-                      <a:endParaRPr lang="en-US" sz="1050" dirty="0">
-                        <a:latin typeface="Calibri" charset="0"/>
-                        <a:ea typeface="Calibri" charset="0"/>
-                        <a:cs typeface="Calibri" charset="0"/>
-                      </a:endParaRPr>
-                    </a:p>
-                  </a:txBody>
-                  <a:tcPr marL="36576" marR="36576" marT="36576" marB="36576" anchor="ctr">
-                    <a:lnL w="6350" cap="flat" cmpd="sng" algn="ctr">
-                      <a:solidFill>
-                        <a:srgbClr val="D9CBEF"/>
-                      </a:solidFill>
-                      <a:prstDash val="solid"/>
-                      <a:round/>
-                      <a:headEnd type="none" w="med" len="med"/>
-                      <a:tailEnd type="none" w="med" len="med"/>
-                    </a:lnL>
-                    <a:lnR w="6350" cap="flat" cmpd="sng" algn="ctr">
-                      <a:solidFill>
-                        <a:srgbClr val="D9CBEF"/>
-                      </a:solidFill>
-                      <a:prstDash val="solid"/>
-                      <a:round/>
-                      <a:headEnd type="none" w="med" len="med"/>
-                      <a:tailEnd type="none" w="med" len="med"/>
-                    </a:lnR>
-                    <a:lnT w="6350" cap="flat" cmpd="sng" algn="ctr">
-                      <a:solidFill>
-                        <a:srgbClr val="D9CBEF"/>
-                      </a:solidFill>
-                      <a:prstDash val="solid"/>
-                      <a:round/>
-                      <a:headEnd type="none" w="med" len="med"/>
-                      <a:tailEnd type="none" w="med" len="med"/>
-                    </a:lnT>
-                    <a:lnB w="6350" cap="flat" cmpd="sng" algn="ctr">
-                      <a:solidFill>
-                        <a:srgbClr val="D9CBEF"/>
-                      </a:solidFill>
-                      <a:prstDash val="solid"/>
-                      <a:round/>
-                      <a:headEnd type="none" w="med" len="med"/>
-                      <a:tailEnd type="none" w="med" len="med"/>
-                    </a:lnB>
-                    <a:solidFill>
-                      <a:srgbClr val="EFE9F8"/>
-                    </a:solidFill>
-                  </a:tcPr>
-                </a:tc>
-              </a:tr>
-              <a:tr h="292608">
-                <a:tc>
-                  <a:txBody>
-                    <a:bodyPr/>
-                    <a:lstStyle/>
-                    <a:p>
-                      <a:pPr indent="0" marL="0">
-                        <a:buNone/>
-                      </a:pPr>
-                      <a:r>
-                        <a:rPr lang="en-US" sz="1050" dirty="0">
-                          <a:solidFill>
-                            <a:srgbClr val="2B2140"/>
-                          </a:solidFill>
-                          <a:latin typeface="Calibri" pitchFamily="34" charset="0"/>
-                          <a:ea typeface="Calibri" pitchFamily="34" charset="-122"/>
-                          <a:cs typeface="Calibri" pitchFamily="34" charset="-120"/>
-                        </a:rPr>
-                        <a:t>NEIGHBOUR_REPLY</a:t>
-                      </a:r>
-                      <a:endParaRPr lang="en-US" sz="1050" dirty="0">
-                        <a:latin typeface="Calibri" charset="0"/>
-                        <a:ea typeface="Calibri" charset="0"/>
-                        <a:cs typeface="Calibri" charset="0"/>
-                      </a:endParaRPr>
-                    </a:p>
-                  </a:txBody>
-                  <a:tcPr marL="36576" marR="36576" marT="36576" marB="36576" anchor="ctr">
-                    <a:lnL w="6350" cap="flat" cmpd="sng" algn="ctr">
-                      <a:solidFill>
-                        <a:srgbClr val="D9CBEF"/>
-                      </a:solidFill>
-                      <a:prstDash val="solid"/>
-                      <a:round/>
-                      <a:headEnd type="none" w="med" len="med"/>
-                      <a:tailEnd type="none" w="med" len="med"/>
-                    </a:lnL>
-                    <a:lnR w="6350" cap="flat" cmpd="sng" algn="ctr">
-                      <a:solidFill>
-                        <a:srgbClr val="D9CBEF"/>
-                      </a:solidFill>
-                      <a:prstDash val="solid"/>
-                      <a:round/>
-                      <a:headEnd type="none" w="med" len="med"/>
-                      <a:tailEnd type="none" w="med" len="med"/>
-                    </a:lnR>
-                    <a:lnT w="6350" cap="flat" cmpd="sng" algn="ctr">
-                      <a:solidFill>
-                        <a:srgbClr val="D9CBEF"/>
-                      </a:solidFill>
-                      <a:prstDash val="solid"/>
-                      <a:round/>
-                      <a:headEnd type="none" w="med" len="med"/>
-                      <a:tailEnd type="none" w="med" len="med"/>
-                    </a:lnT>
-                    <a:lnB w="6350" cap="flat" cmpd="sng" algn="ctr">
-                      <a:solidFill>
-                        <a:srgbClr val="D9CBEF"/>
-                      </a:solidFill>
-                      <a:prstDash val="solid"/>
-                      <a:round/>
-                      <a:headEnd type="none" w="med" len="med"/>
-                      <a:tailEnd type="none" w="med" len="med"/>
-                    </a:lnB>
-                    <a:solidFill>
-                      <a:srgbClr val="FFFFFF"/>
-                    </a:solidFill>
-                  </a:tcPr>
-                </a:tc>
-                <a:tc>
-                  <a:txBody>
-                    <a:bodyPr/>
-                    <a:lstStyle/>
-                    <a:p>
-                      <a:pPr indent="0" marL="0">
-                        <a:buNone/>
-                      </a:pPr>
-                      <a:r>
-                        <a:rPr lang="en-US" sz="1050" dirty="0">
-                          <a:solidFill>
-                            <a:srgbClr val="2B2140"/>
-                          </a:solidFill>
-                          <a:latin typeface="Calibri" pitchFamily="34" charset="0"/>
-                          <a:ea typeface="Calibri" pitchFamily="34" charset="-122"/>
-                          <a:cs typeface="Calibri" pitchFamily="34" charset="-120"/>
-                        </a:rPr>
-                        <a:t>neighbour → node</a:t>
-                      </a:r>
-                      <a:endParaRPr lang="en-US" sz="1050" dirty="0">
-                        <a:latin typeface="Calibri" charset="0"/>
-                        <a:ea typeface="Calibri" charset="0"/>
-                        <a:cs typeface="Calibri" charset="0"/>
-                      </a:endParaRPr>
-                    </a:p>
-                  </a:txBody>
-                  <a:tcPr marL="36576" marR="36576" marT="36576" marB="36576" anchor="ctr">
-                    <a:lnL w="6350" cap="flat" cmpd="sng" algn="ctr">
-                      <a:solidFill>
-                        <a:srgbClr val="D9CBEF"/>
-                      </a:solidFill>
-                      <a:prstDash val="solid"/>
-                      <a:round/>
-                      <a:headEnd type="none" w="med" len="med"/>
-                      <a:tailEnd type="none" w="med" len="med"/>
-                    </a:lnL>
-                    <a:lnR w="6350" cap="flat" cmpd="sng" algn="ctr">
-                      <a:solidFill>
-                        <a:srgbClr val="D9CBEF"/>
-                      </a:solidFill>
-                      <a:prstDash val="solid"/>
-                      <a:round/>
-                      <a:headEnd type="none" w="med" len="med"/>
-                      <a:tailEnd type="none" w="med" len="med"/>
-                    </a:lnR>
-                    <a:lnT w="6350" cap="flat" cmpd="sng" algn="ctr">
-                      <a:solidFill>
-                        <a:srgbClr val="D9CBEF"/>
-                      </a:solidFill>
-                      <a:prstDash val="solid"/>
-                      <a:round/>
-                      <a:headEnd type="none" w="med" len="med"/>
-                      <a:tailEnd type="none" w="med" len="med"/>
-                    </a:lnT>
-                    <a:lnB w="6350" cap="flat" cmpd="sng" algn="ctr">
-                      <a:solidFill>
-                        <a:srgbClr val="D9CBEF"/>
-                      </a:solidFill>
-                      <a:prstDash val="solid"/>
-                      <a:round/>
-                      <a:headEnd type="none" w="med" len="med"/>
-                      <a:tailEnd type="none" w="med" len="med"/>
-                    </a:lnB>
-                    <a:solidFill>
-                      <a:srgbClr val="FFFFFF"/>
-                    </a:solidFill>
-                  </a:tcPr>
-                </a:tc>
-                <a:tc>
-                  <a:txBody>
-                    <a:bodyPr/>
-                    <a:lstStyle/>
-                    <a:p>
-                      <a:pPr indent="0" marL="0">
-                        <a:buNone/>
-                      </a:pPr>
-                      <a:r>
-                        <a:rPr lang="en-US" sz="1050" dirty="0">
-                          <a:solidFill>
-                            <a:srgbClr val="2B2140"/>
-                          </a:solidFill>
-                          <a:latin typeface="Calibri" pitchFamily="34" charset="0"/>
-                          <a:ea typeface="Calibri" pitchFamily="34" charset="-122"/>
-                          <a:cs typeface="Calibri" pitchFamily="34" charset="-120"/>
-                        </a:rPr>
-                        <a:t>MPI_Isend</a:t>
-                      </a:r>
-                      <a:endParaRPr lang="en-US" sz="1050" dirty="0">
-                        <a:latin typeface="Calibri" charset="0"/>
-                        <a:ea typeface="Calibri" charset="0"/>
-                        <a:cs typeface="Calibri" charset="0"/>
-                      </a:endParaRPr>
-                    </a:p>
-                  </a:txBody>
-                  <a:tcPr marL="36576" marR="36576" marT="36576" marB="36576" anchor="ctr">
-                    <a:lnL w="6350" cap="flat" cmpd="sng" algn="ctr">
-                      <a:solidFill>
-                        <a:srgbClr val="D9CBEF"/>
-                      </a:solidFill>
-                      <a:prstDash val="solid"/>
-                      <a:round/>
-                      <a:headEnd type="none" w="med" len="med"/>
-                      <a:tailEnd type="none" w="med" len="med"/>
-                    </a:lnL>
-                    <a:lnR w="6350" cap="flat" cmpd="sng" algn="ctr">
-                      <a:solidFill>
-                        <a:srgbClr val="D9CBEF"/>
-                      </a:solidFill>
-                      <a:prstDash val="solid"/>
-                      <a:round/>
-                      <a:headEnd type="none" w="med" len="med"/>
-                      <a:tailEnd type="none" w="med" len="med"/>
-                    </a:lnR>
-                    <a:lnT w="6350" cap="flat" cmpd="sng" algn="ctr">
-                      <a:solidFill>
-                        <a:srgbClr val="D9CBEF"/>
-                      </a:solidFill>
-                      <a:prstDash val="solid"/>
-                      <a:round/>
-                      <a:headEnd type="none" w="med" len="med"/>
-                      <a:tailEnd type="none" w="med" len="med"/>
-                    </a:lnT>
-                    <a:lnB w="6350" cap="flat" cmpd="sng" algn="ctr">
-                      <a:solidFill>
-                        <a:srgbClr val="D9CBEF"/>
-                      </a:solidFill>
-                      <a:prstDash val="solid"/>
-                      <a:round/>
-                      <a:headEnd type="none" w="med" len="med"/>
-                      <a:tailEnd type="none" w="med" len="med"/>
-                    </a:lnB>
-                    <a:solidFill>
-                      <a:srgbClr val="FFFFFF"/>
-                    </a:solidFill>
-                  </a:tcPr>
-                </a:tc>
-              </a:tr>
-              <a:tr h="292608">
-                <a:tc>
-                  <a:txBody>
-                    <a:bodyPr/>
-                    <a:lstStyle/>
-                    <a:p>
-                      <a:pPr indent="0" marL="0">
-                        <a:buNone/>
-                      </a:pPr>
-                      <a:r>
-                        <a:rPr lang="en-US" sz="1050" dirty="0">
-                          <a:solidFill>
-                            <a:srgbClr val="2B2140"/>
-                          </a:solidFill>
-                          <a:latin typeface="Calibri" pitchFamily="34" charset="0"/>
-                          <a:ea typeface="Calibri" pitchFamily="34" charset="-122"/>
-                          <a:cs typeface="Calibri" pitchFamily="34" charset="-120"/>
-                        </a:rPr>
-                        <a:t>BS_ALERT</a:t>
-                      </a:r>
-                      <a:endParaRPr lang="en-US" sz="1050" dirty="0">
-                        <a:latin typeface="Calibri" charset="0"/>
-                        <a:ea typeface="Calibri" charset="0"/>
-                        <a:cs typeface="Calibri" charset="0"/>
-                      </a:endParaRPr>
-                    </a:p>
-                  </a:txBody>
-                  <a:tcPr marL="36576" marR="36576" marT="36576" marB="36576" anchor="ctr">
-                    <a:lnL w="6350" cap="flat" cmpd="sng" algn="ctr">
-                      <a:solidFill>
-                        <a:srgbClr val="D9CBEF"/>
-                      </a:solidFill>
-                      <a:prstDash val="solid"/>
-                      <a:round/>
-                      <a:headEnd type="none" w="med" len="med"/>
-                      <a:tailEnd type="none" w="med" len="med"/>
-                    </a:lnL>
-                    <a:lnR w="6350" cap="flat" cmpd="sng" algn="ctr">
-                      <a:solidFill>
-                        <a:srgbClr val="D9CBEF"/>
-                      </a:solidFill>
-                      <a:prstDash val="solid"/>
-                      <a:round/>
-                      <a:headEnd type="none" w="med" len="med"/>
-                      <a:tailEnd type="none" w="med" len="med"/>
-                    </a:lnR>
-                    <a:lnT w="6350" cap="flat" cmpd="sng" algn="ctr">
-                      <a:solidFill>
-                        <a:srgbClr val="D9CBEF"/>
-                      </a:solidFill>
-                      <a:prstDash val="solid"/>
-                      <a:round/>
-                      <a:headEnd type="none" w="med" len="med"/>
-                      <a:tailEnd type="none" w="med" len="med"/>
-                    </a:lnT>
-                    <a:lnB w="6350" cap="flat" cmpd="sng" algn="ctr">
-                      <a:solidFill>
-                        <a:srgbClr val="D9CBEF"/>
-                      </a:solidFill>
-                      <a:prstDash val="solid"/>
-                      <a:round/>
-                      <a:headEnd type="none" w="med" len="med"/>
-                      <a:tailEnd type="none" w="med" len="med"/>
-                    </a:lnB>
-                    <a:solidFill>
-                      <a:srgbClr val="EFE9F8"/>
-                    </a:solidFill>
-                  </a:tcPr>
-                </a:tc>
-                <a:tc>
-                  <a:txBody>
-                    <a:bodyPr/>
-                    <a:lstStyle/>
-                    <a:p>
-                      <a:pPr indent="0" marL="0">
-                        <a:buNone/>
-                      </a:pPr>
-                      <a:r>
-                        <a:rPr lang="en-US" sz="1050" dirty="0">
-                          <a:solidFill>
-                            <a:srgbClr val="2B2140"/>
-                          </a:solidFill>
-                          <a:latin typeface="Calibri" pitchFamily="34" charset="0"/>
-                          <a:ea typeface="Calibri" pitchFamily="34" charset="-122"/>
-                          <a:cs typeface="Calibri" pitchFamily="34" charset="-120"/>
-                        </a:rPr>
-                        <a:t>node → base station</a:t>
-                      </a:r>
-                      <a:endParaRPr lang="en-US" sz="1050" dirty="0">
-                        <a:latin typeface="Calibri" charset="0"/>
-                        <a:ea typeface="Calibri" charset="0"/>
-                        <a:cs typeface="Calibri" charset="0"/>
-                      </a:endParaRPr>
-                    </a:p>
-                  </a:txBody>
-                  <a:tcPr marL="36576" marR="36576" marT="36576" marB="36576" anchor="ctr">
-                    <a:lnL w="6350" cap="flat" cmpd="sng" algn="ctr">
-                      <a:solidFill>
-                        <a:srgbClr val="D9CBEF"/>
-                      </a:solidFill>
-                      <a:prstDash val="solid"/>
-                      <a:round/>
-                      <a:headEnd type="none" w="med" len="med"/>
-                      <a:tailEnd type="none" w="med" len="med"/>
-                    </a:lnL>
-                    <a:lnR w="6350" cap="flat" cmpd="sng" algn="ctr">
-                      <a:solidFill>
-                        <a:srgbClr val="D9CBEF"/>
-                      </a:solidFill>
-                      <a:prstDash val="solid"/>
-                      <a:round/>
-                      <a:headEnd type="none" w="med" len="med"/>
-                      <a:tailEnd type="none" w="med" len="med"/>
-                    </a:lnR>
-                    <a:lnT w="6350" cap="flat" cmpd="sng" algn="ctr">
-                      <a:solidFill>
-                        <a:srgbClr val="D9CBEF"/>
-                      </a:solidFill>
-                      <a:prstDash val="solid"/>
-                      <a:round/>
-                      <a:headEnd type="none" w="med" len="med"/>
-                      <a:tailEnd type="none" w="med" len="med"/>
-                    </a:lnT>
-                    <a:lnB w="6350" cap="flat" cmpd="sng" algn="ctr">
-                      <a:solidFill>
-                        <a:srgbClr val="D9CBEF"/>
-                      </a:solidFill>
-                      <a:prstDash val="solid"/>
-                      <a:round/>
-                      <a:headEnd type="none" w="med" len="med"/>
-                      <a:tailEnd type="none" w="med" len="med"/>
-                    </a:lnB>
-                    <a:solidFill>
-                      <a:srgbClr val="EFE9F8"/>
-                    </a:solidFill>
-                  </a:tcPr>
-                </a:tc>
-                <a:tc>
-                  <a:txBody>
-                    <a:bodyPr/>
-                    <a:lstStyle/>
-                    <a:p>
-                      <a:pPr indent="0" marL="0">
-                        <a:buNone/>
-                      </a:pPr>
-                      <a:r>
-                        <a:rPr lang="en-US" sz="1050" dirty="0">
-                          <a:solidFill>
-                            <a:srgbClr val="2B2140"/>
-                          </a:solidFill>
-                          <a:latin typeface="Calibri" pitchFamily="34" charset="0"/>
-                          <a:ea typeface="Calibri" pitchFamily="34" charset="-122"/>
-                          <a:cs typeface="Calibri" pitchFamily="34" charset="-120"/>
-                        </a:rPr>
-                        <a:t>MPI_Type_create_struct</a:t>
-                      </a:r>
-                      <a:endParaRPr lang="en-US" sz="1050" dirty="0">
-                        <a:latin typeface="Calibri" charset="0"/>
-                        <a:ea typeface="Calibri" charset="0"/>
-                        <a:cs typeface="Calibri" charset="0"/>
-                      </a:endParaRPr>
-                    </a:p>
-                  </a:txBody>
-                  <a:tcPr marL="36576" marR="36576" marT="36576" marB="36576" anchor="ctr">
-                    <a:lnL w="6350" cap="flat" cmpd="sng" algn="ctr">
-                      <a:solidFill>
-                        <a:srgbClr val="D9CBEF"/>
-                      </a:solidFill>
-                      <a:prstDash val="solid"/>
-                      <a:round/>
-                      <a:headEnd type="none" w="med" len="med"/>
-                      <a:tailEnd type="none" w="med" len="med"/>
-                    </a:lnL>
-                    <a:lnR w="6350" cap="flat" cmpd="sng" algn="ctr">
-                      <a:solidFill>
-                        <a:srgbClr val="D9CBEF"/>
-                      </a:solidFill>
-                      <a:prstDash val="solid"/>
-                      <a:round/>
-                      <a:headEnd type="none" w="med" len="med"/>
-                      <a:tailEnd type="none" w="med" len="med"/>
-                    </a:lnR>
-                    <a:lnT w="6350" cap="flat" cmpd="sng" algn="ctr">
-                      <a:solidFill>
-                        <a:srgbClr val="D9CBEF"/>
-                      </a:solidFill>
-                      <a:prstDash val="solid"/>
-                      <a:round/>
-                      <a:headEnd type="none" w="med" len="med"/>
-                      <a:tailEnd type="none" w="med" len="med"/>
-                    </a:lnT>
-                    <a:lnB w="6350" cap="flat" cmpd="sng" algn="ctr">
-                      <a:solidFill>
-                        <a:srgbClr val="D9CBEF"/>
-                      </a:solidFill>
-                      <a:prstDash val="solid"/>
-                      <a:round/>
-                      <a:headEnd type="none" w="med" len="med"/>
-                      <a:tailEnd type="none" w="med" len="med"/>
-                    </a:lnB>
-                    <a:solidFill>
-                      <a:srgbClr val="EFE9F8"/>
-                    </a:solidFill>
-                  </a:tcPr>
-                </a:tc>
-              </a:tr>
-              <a:tr h="292608">
-                <a:tc>
-                  <a:txBody>
-                    <a:bodyPr/>
-                    <a:lstStyle/>
-                    <a:p>
-                      <a:pPr indent="0" marL="0">
-                        <a:buNone/>
-                      </a:pPr>
-                      <a:r>
-                        <a:rPr lang="en-US" sz="1050" dirty="0">
-                          <a:solidFill>
-                            <a:srgbClr val="2B2140"/>
-                          </a:solidFill>
-                          <a:latin typeface="Calibri" pitchFamily="34" charset="0"/>
-                          <a:ea typeface="Calibri" pitchFamily="34" charset="-122"/>
-                          <a:cs typeface="Calibri" pitchFamily="34" charset="-120"/>
-                        </a:rPr>
-                        <a:t>BS_REDIRECT</a:t>
-                      </a:r>
-                      <a:endParaRPr lang="en-US" sz="1050" dirty="0">
-                        <a:latin typeface="Calibri" charset="0"/>
-                        <a:ea typeface="Calibri" charset="0"/>
-                        <a:cs typeface="Calibri" charset="0"/>
-                      </a:endParaRPr>
-                    </a:p>
-                  </a:txBody>
-                  <a:tcPr marL="36576" marR="36576" marT="36576" marB="36576" anchor="ctr">
-                    <a:lnL w="6350" cap="flat" cmpd="sng" algn="ctr">
-                      <a:solidFill>
-                        <a:srgbClr val="D9CBEF"/>
-                      </a:solidFill>
-                      <a:prstDash val="solid"/>
-                      <a:round/>
-                      <a:headEnd type="none" w="med" len="med"/>
-                      <a:tailEnd type="none" w="med" len="med"/>
-                    </a:lnL>
-                    <a:lnR w="6350" cap="flat" cmpd="sng" algn="ctr">
-                      <a:solidFill>
-                        <a:srgbClr val="D9CBEF"/>
-                      </a:solidFill>
-                      <a:prstDash val="solid"/>
-                      <a:round/>
-                      <a:headEnd type="none" w="med" len="med"/>
-                      <a:tailEnd type="none" w="med" len="med"/>
-                    </a:lnR>
-                    <a:lnT w="6350" cap="flat" cmpd="sng" algn="ctr">
-                      <a:solidFill>
-                        <a:srgbClr val="D9CBEF"/>
-                      </a:solidFill>
-                      <a:prstDash val="solid"/>
-                      <a:round/>
-                      <a:headEnd type="none" w="med" len="med"/>
-                      <a:tailEnd type="none" w="med" len="med"/>
-                    </a:lnT>
-                    <a:lnB w="6350" cap="flat" cmpd="sng" algn="ctr">
-                      <a:solidFill>
-                        <a:srgbClr val="D9CBEF"/>
-                      </a:solidFill>
-                      <a:prstDash val="solid"/>
-                      <a:round/>
-                      <a:headEnd type="none" w="med" len="med"/>
-                      <a:tailEnd type="none" w="med" len="med"/>
-                    </a:lnB>
-                    <a:solidFill>
-                      <a:srgbClr val="FFFFFF"/>
-                    </a:solidFill>
-                  </a:tcPr>
-                </a:tc>
-                <a:tc>
-                  <a:txBody>
-                    <a:bodyPr/>
-                    <a:lstStyle/>
-                    <a:p>
-                      <a:pPr indent="0" marL="0">
-                        <a:buNone/>
-                      </a:pPr>
-                      <a:r>
-                        <a:rPr lang="en-US" sz="1050" dirty="0">
-                          <a:solidFill>
-                            <a:srgbClr val="2B2140"/>
-                          </a:solidFill>
-                          <a:latin typeface="Calibri" pitchFamily="34" charset="0"/>
-                          <a:ea typeface="Calibri" pitchFamily="34" charset="-122"/>
-                          <a:cs typeface="Calibri" pitchFamily="34" charset="-120"/>
-                        </a:rPr>
-                        <a:t>base station → node</a:t>
-                      </a:r>
-                      <a:endParaRPr lang="en-US" sz="1050" dirty="0">
-                        <a:latin typeface="Calibri" charset="0"/>
-                        <a:ea typeface="Calibri" charset="0"/>
-                        <a:cs typeface="Calibri" charset="0"/>
-                      </a:endParaRPr>
-                    </a:p>
-                  </a:txBody>
-                  <a:tcPr marL="36576" marR="36576" marT="36576" marB="36576" anchor="ctr">
-                    <a:lnL w="6350" cap="flat" cmpd="sng" algn="ctr">
-                      <a:solidFill>
-                        <a:srgbClr val="D9CBEF"/>
-                      </a:solidFill>
-                      <a:prstDash val="solid"/>
-                      <a:round/>
-                      <a:headEnd type="none" w="med" len="med"/>
-                      <a:tailEnd type="none" w="med" len="med"/>
-                    </a:lnL>
-                    <a:lnR w="6350" cap="flat" cmpd="sng" algn="ctr">
-                      <a:solidFill>
-                        <a:srgbClr val="D9CBEF"/>
-                      </a:solidFill>
-                      <a:prstDash val="solid"/>
-                      <a:round/>
-                      <a:headEnd type="none" w="med" len="med"/>
-                      <a:tailEnd type="none" w="med" len="med"/>
-                    </a:lnR>
-                    <a:lnT w="6350" cap="flat" cmpd="sng" algn="ctr">
-                      <a:solidFill>
-                        <a:srgbClr val="D9CBEF"/>
-                      </a:solidFill>
-                      <a:prstDash val="solid"/>
-                      <a:round/>
-                      <a:headEnd type="none" w="med" len="med"/>
-                      <a:tailEnd type="none" w="med" len="med"/>
-                    </a:lnT>
-                    <a:lnB w="6350" cap="flat" cmpd="sng" algn="ctr">
-                      <a:solidFill>
-                        <a:srgbClr val="D9CBEF"/>
-                      </a:solidFill>
-                      <a:prstDash val="solid"/>
-                      <a:round/>
-                      <a:headEnd type="none" w="med" len="med"/>
-                      <a:tailEnd type="none" w="med" len="med"/>
-                    </a:lnB>
-                    <a:solidFill>
-                      <a:srgbClr val="FFFFFF"/>
-                    </a:solidFill>
-                  </a:tcPr>
-                </a:tc>
-                <a:tc>
-                  <a:txBody>
-                    <a:bodyPr/>
-                    <a:lstStyle/>
-                    <a:p>
-                      <a:pPr indent="0" marL="0">
-                        <a:buNone/>
-                      </a:pPr>
-                      <a:r>
-                        <a:rPr lang="en-US" sz="1050" dirty="0">
-                          <a:solidFill>
-                            <a:srgbClr val="2B2140"/>
-                          </a:solidFill>
-                          <a:latin typeface="Calibri" pitchFamily="34" charset="0"/>
-                          <a:ea typeface="Calibri" pitchFamily="34" charset="-122"/>
-                          <a:cs typeface="Calibri" pitchFamily="34" charset="-120"/>
-                        </a:rPr>
-                        <a:t>MPI_Send</a:t>
-                      </a:r>
-                      <a:endParaRPr lang="en-US" sz="1050" dirty="0">
-                        <a:latin typeface="Calibri" charset="0"/>
-                        <a:ea typeface="Calibri" charset="0"/>
-                        <a:cs typeface="Calibri" charset="0"/>
-                      </a:endParaRPr>
-                    </a:p>
-                  </a:txBody>
-                  <a:tcPr marL="36576" marR="36576" marT="36576" marB="36576" anchor="ctr">
-                    <a:lnL w="6350" cap="flat" cmpd="sng" algn="ctr">
-                      <a:solidFill>
-                        <a:srgbClr val="D9CBEF"/>
-                      </a:solidFill>
-                      <a:prstDash val="solid"/>
-                      <a:round/>
-                      <a:headEnd type="none" w="med" len="med"/>
-                      <a:tailEnd type="none" w="med" len="med"/>
-                    </a:lnL>
-                    <a:lnR w="6350" cap="flat" cmpd="sng" algn="ctr">
-                      <a:solidFill>
-                        <a:srgbClr val="D9CBEF"/>
-                      </a:solidFill>
-                      <a:prstDash val="solid"/>
-                      <a:round/>
-                      <a:headEnd type="none" w="med" len="med"/>
-                      <a:tailEnd type="none" w="med" len="med"/>
-                    </a:lnR>
-                    <a:lnT w="6350" cap="flat" cmpd="sng" algn="ctr">
-                      <a:solidFill>
-                        <a:srgbClr val="D9CBEF"/>
-                      </a:solidFill>
-                      <a:prstDash val="solid"/>
-                      <a:round/>
-                      <a:headEnd type="none" w="med" len="med"/>
-                      <a:tailEnd type="none" w="med" len="med"/>
-                    </a:lnT>
-                    <a:lnB w="6350" cap="flat" cmpd="sng" algn="ctr">
-                      <a:solidFill>
-                        <a:srgbClr val="D9CBEF"/>
-                      </a:solidFill>
-                      <a:prstDash val="solid"/>
-                      <a:round/>
-                      <a:headEnd type="none" w="med" len="med"/>
-                      <a:tailEnd type="none" w="med" len="med"/>
-                    </a:lnB>
-                    <a:solidFill>
-                      <a:srgbClr val="FFFFFF"/>
-                    </a:solidFill>
-                  </a:tcPr>
-                </a:tc>
-              </a:tr>
-              <a:tr h="292608">
-                <a:tc>
-                  <a:txBody>
-                    <a:bodyPr/>
-                    <a:lstStyle/>
-                    <a:p>
-                      <a:pPr indent="0" marL="0">
-                        <a:buNone/>
-                      </a:pPr>
-                      <a:r>
-                        <a:rPr lang="en-US" sz="1050" dirty="0">
-                          <a:solidFill>
-                            <a:srgbClr val="2B2140"/>
-                          </a:solidFill>
-                          <a:latin typeface="Calibri" pitchFamily="34" charset="0"/>
-                          <a:ea typeface="Calibri" pitchFamily="34" charset="-122"/>
-                          <a:cs typeface="Calibri" pitchFamily="34" charset="-120"/>
-                        </a:rPr>
-                        <a:t>HEARTBEAT (optional)</a:t>
-                      </a:r>
-                      <a:endParaRPr lang="en-US" sz="1050" dirty="0">
-                        <a:latin typeface="Calibri" charset="0"/>
-                        <a:ea typeface="Calibri" charset="0"/>
-                        <a:cs typeface="Calibri" charset="0"/>
-                      </a:endParaRPr>
-                    </a:p>
-                  </a:txBody>
-                  <a:tcPr marL="36576" marR="36576" marT="36576" marB="36576" anchor="ctr">
-                    <a:lnL w="6350" cap="flat" cmpd="sng" algn="ctr">
-                      <a:solidFill>
-                        <a:srgbClr val="D9CBEF"/>
-                      </a:solidFill>
-                      <a:prstDash val="solid"/>
-                      <a:round/>
-                      <a:headEnd type="none" w="med" len="med"/>
-                      <a:tailEnd type="none" w="med" len="med"/>
-                    </a:lnL>
-                    <a:lnR w="6350" cap="flat" cmpd="sng" algn="ctr">
-                      <a:solidFill>
-                        <a:srgbClr val="D9CBEF"/>
-                      </a:solidFill>
-                      <a:prstDash val="solid"/>
-                      <a:round/>
-                      <a:headEnd type="none" w="med" len="med"/>
-                      <a:tailEnd type="none" w="med" len="med"/>
-                    </a:lnR>
-                    <a:lnT w="6350" cap="flat" cmpd="sng" algn="ctr">
-                      <a:solidFill>
-                        <a:srgbClr val="D9CBEF"/>
-                      </a:solidFill>
-                      <a:prstDash val="solid"/>
-                      <a:round/>
-                      <a:headEnd type="none" w="med" len="med"/>
-                      <a:tailEnd type="none" w="med" len="med"/>
-                    </a:lnT>
-                    <a:lnB w="6350" cap="flat" cmpd="sng" algn="ctr">
-                      <a:solidFill>
-                        <a:srgbClr val="D9CBEF"/>
-                      </a:solidFill>
-                      <a:prstDash val="solid"/>
-                      <a:round/>
-                      <a:headEnd type="none" w="med" len="med"/>
-                      <a:tailEnd type="none" w="med" len="med"/>
-                    </a:lnB>
-                    <a:solidFill>
-                      <a:srgbClr val="EFE9F8"/>
-                    </a:solidFill>
-                  </a:tcPr>
-                </a:tc>
-                <a:tc>
-                  <a:txBody>
-                    <a:bodyPr/>
-                    <a:lstStyle/>
-                    <a:p>
-                      <a:pPr indent="0" marL="0">
-                        <a:buNone/>
-                      </a:pPr>
-                      <a:r>
-                        <a:rPr lang="en-US" sz="1050" dirty="0">
-                          <a:solidFill>
-                            <a:srgbClr val="2B2140"/>
-                          </a:solidFill>
-                          <a:latin typeface="Calibri" pitchFamily="34" charset="0"/>
-                          <a:ea typeface="Calibri" pitchFamily="34" charset="-122"/>
-                          <a:cs typeface="Calibri" pitchFamily="34" charset="-120"/>
-                        </a:rPr>
-                        <a:t>node → base station</a:t>
-                      </a:r>
-                      <a:endParaRPr lang="en-US" sz="1050" dirty="0">
-                        <a:latin typeface="Calibri" charset="0"/>
-                        <a:ea typeface="Calibri" charset="0"/>
-                        <a:cs typeface="Calibri" charset="0"/>
-                      </a:endParaRPr>
-                    </a:p>
-                  </a:txBody>
-                  <a:tcPr marL="36576" marR="36576" marT="36576" marB="36576" anchor="ctr">
-                    <a:lnL w="6350" cap="flat" cmpd="sng" algn="ctr">
-                      <a:solidFill>
-                        <a:srgbClr val="D9CBEF"/>
-                      </a:solidFill>
-                      <a:prstDash val="solid"/>
-                      <a:round/>
-                      <a:headEnd type="none" w="med" len="med"/>
-                      <a:tailEnd type="none" w="med" len="med"/>
-                    </a:lnL>
-                    <a:lnR w="6350" cap="flat" cmpd="sng" algn="ctr">
-                      <a:solidFill>
-                        <a:srgbClr val="D9CBEF"/>
-                      </a:solidFill>
-                      <a:prstDash val="solid"/>
-                      <a:round/>
-                      <a:headEnd type="none" w="med" len="med"/>
-                      <a:tailEnd type="none" w="med" len="med"/>
-                    </a:lnR>
-                    <a:lnT w="6350" cap="flat" cmpd="sng" algn="ctr">
-                      <a:solidFill>
-                        <a:srgbClr val="D9CBEF"/>
-                      </a:solidFill>
-                      <a:prstDash val="solid"/>
-                      <a:round/>
-                      <a:headEnd type="none" w="med" len="med"/>
-                      <a:tailEnd type="none" w="med" len="med"/>
-                    </a:lnT>
-                    <a:lnB w="6350" cap="flat" cmpd="sng" algn="ctr">
-                      <a:solidFill>
-                        <a:srgbClr val="D9CBEF"/>
-                      </a:solidFill>
-                      <a:prstDash val="solid"/>
-                      <a:round/>
-                      <a:headEnd type="none" w="med" len="med"/>
-                      <a:tailEnd type="none" w="med" len="med"/>
-                    </a:lnB>
-                    <a:solidFill>
-                      <a:srgbClr val="EFE9F8"/>
-                    </a:solidFill>
-                  </a:tcPr>
-                </a:tc>
-                <a:tc>
-                  <a:txBody>
-                    <a:bodyPr/>
-                    <a:lstStyle/>
-                    <a:p>
-                      <a:pPr indent="0" marL="0">
-                        <a:buNone/>
-                      </a:pPr>
-                      <a:r>
-                        <a:rPr lang="en-US" sz="1050" dirty="0">
-                          <a:solidFill>
-                            <a:srgbClr val="2B2140"/>
-                          </a:solidFill>
-                          <a:latin typeface="Calibri" pitchFamily="34" charset="0"/>
-                          <a:ea typeface="Calibri" pitchFamily="34" charset="-122"/>
-                          <a:cs typeface="Calibri" pitchFamily="34" charset="-120"/>
-                        </a:rPr>
-                        <a:t>Periodic MPI_Isend</a:t>
-                      </a:r>
-                      <a:endParaRPr lang="en-US" sz="1050" dirty="0">
-                        <a:latin typeface="Calibri" charset="0"/>
-                        <a:ea typeface="Calibri" charset="0"/>
-                        <a:cs typeface="Calibri" charset="0"/>
-                      </a:endParaRPr>
-                    </a:p>
-                  </a:txBody>
-                  <a:tcPr marL="36576" marR="36576" marT="36576" marB="36576" anchor="ctr">
-                    <a:lnL w="6350" cap="flat" cmpd="sng" algn="ctr">
-                      <a:solidFill>
-                        <a:srgbClr val="D9CBEF"/>
-                      </a:solidFill>
-                      <a:prstDash val="solid"/>
-                      <a:round/>
-                      <a:headEnd type="none" w="med" len="med"/>
-                      <a:tailEnd type="none" w="med" len="med"/>
-                    </a:lnL>
-                    <a:lnR w="6350" cap="flat" cmpd="sng" algn="ctr">
-                      <a:solidFill>
-                        <a:srgbClr val="D9CBEF"/>
-                      </a:solidFill>
-                      <a:prstDash val="solid"/>
-                      <a:round/>
-                      <a:headEnd type="none" w="med" len="med"/>
-                      <a:tailEnd type="none" w="med" len="med"/>
-                    </a:lnR>
-                    <a:lnT w="6350" cap="flat" cmpd="sng" algn="ctr">
-                      <a:solidFill>
-                        <a:srgbClr val="D9CBEF"/>
-                      </a:solidFill>
-                      <a:prstDash val="solid"/>
-                      <a:round/>
-                      <a:headEnd type="none" w="med" len="med"/>
-                      <a:tailEnd type="none" w="med" len="med"/>
-                    </a:lnT>
-                    <a:lnB w="6350" cap="flat" cmpd="sng" algn="ctr">
-                      <a:solidFill>
-                        <a:srgbClr val="D9CBEF"/>
-                      </a:solidFill>
-                      <a:prstDash val="solid"/>
-                      <a:round/>
-                      <a:headEnd type="none" w="med" len="med"/>
-                      <a:tailEnd type="none" w="med" len="med"/>
-                    </a:lnB>
-                    <a:solidFill>
-                      <a:srgbClr val="EFE9F8"/>
-                    </a:solidFill>
-                  </a:tcPr>
-                </a:tc>
-              </a:tr>
-            </a:tbl>
-          </a:graphicData>
-        </a:graphic>
-      </p:graphicFrame>
-      <p:sp>
-        <p:nvSpPr>
-          <p:cNvPr id="20" name="Text 17"/>
-          <p:cNvSpPr/>
-          <p:nvPr/>
-        </p:nvSpPr>
-        <p:spPr>
-          <a:xfrm>
-            <a:off x="548640" y="3977640"/>
-            <a:ext cx="4937760" cy="640080"/>
-          </a:xfrm>
-          <a:prstGeom prst="rect">
-            <a:avLst/>
-          </a:prstGeom>
-          <a:noFill/>
-          <a:ln/>
-        </p:spPr>
-        <p:txBody>
-          <a:bodyPr wrap="square" lIns="0" tIns="0" rIns="0" bIns="0" rtlCol="0" anchor="t"/>
-          <a:lstStyle/>
-          <a:p>
-            <a:pPr marL="152400" indent="-152400">
-              <a:buSzPct val="100000"/>
-              <a:buChar char="•"/>
-            </a:pPr>
-            <a:r>
-              <a:rPr lang="en-US" sz="1300" dirty="0">
-                <a:solidFill>
-                  <a:srgbClr val="2B2140"/>
-                </a:solidFill>
-                <a:latin typeface="Calibri" pitchFamily="34" charset="0"/>
-                <a:ea typeface="Calibri" pitchFamily="34" charset="-122"/>
-                <a:cs typeface="Calibri" pitchFamily="34" charset="-120"/>
-              </a:rPr>
-              <a:t>Non-blocking sends: mutual queries cannot deadlock</a:t>
-            </a:r>
-            <a:endParaRPr lang="en-US" sz="1300" dirty="0"/>
-          </a:p>
-        </p:txBody>
-      </p:sp>
-      <p:sp>
-        <p:nvSpPr>
-          <p:cNvPr id="21" name="Shape 18"/>
-          <p:cNvSpPr/>
-          <p:nvPr/>
-        </p:nvSpPr>
-        <p:spPr>
-          <a:xfrm>
-            <a:off x="5715000" y="1371600"/>
-            <a:ext cx="2880360" cy="3200400"/>
-          </a:xfrm>
-          <a:prstGeom prst="roundRect">
-            <a:avLst>
-              <a:gd name="adj" fmla="val 2540"/>
-            </a:avLst>
-          </a:prstGeom>
-          <a:solidFill>
-            <a:srgbClr val="EFE9F8"/>
-          </a:solidFill>
-          <a:ln w="12700">
-            <a:solidFill>
-              <a:srgbClr val="D9CBEF"/>
-            </a:solidFill>
-            <a:prstDash val="solid"/>
-          </a:ln>
-        </p:spPr>
-      </p:sp>
-      <p:sp>
-        <p:nvSpPr>
-          <p:cNvPr id="22" name="Text 19"/>
-          <p:cNvSpPr/>
-          <p:nvPr/>
-        </p:nvSpPr>
-        <p:spPr>
-          <a:xfrm>
-            <a:off x="5715000" y="1371600"/>
-            <a:ext cx="2880360" cy="3200400"/>
-          </a:xfrm>
-          <a:prstGeom prst="rect">
-            <a:avLst/>
-          </a:prstGeom>
-          <a:noFill/>
-          <a:ln/>
-        </p:spPr>
-        <p:txBody>
-          <a:bodyPr wrap="square" rtlCol="0" anchor="ctr"/>
           <a:lstStyle/>
           <a:p>
             <a:pPr algn="ctr" indent="0" marL="0">
               <a:buNone/>
             </a:pPr>
             <a:r>
-              <a:rPr lang="en-US" sz="1300" i="1" dirty="0">
+              <a:rPr lang="en-US" sz="4800" b="1" dirty="0">
                 <a:solidFill>
-                  <a:srgbClr val="7C4DBE"/>
+                  <a:srgbClr val="FFFFFF"/>
                 </a:solidFill>
                 <a:latin typeface="Calibri" pitchFamily="34" charset="0"/>
                 <a:ea typeface="Calibri" pitchFamily="34" charset="-122"/>
                 <a:cs typeface="Calibri" pitchFamily="34" charset="-120"/>
               </a:rPr>
-              <a:t>Communication diagram</a:t>
+              <a:t>Questions?</a:t>
             </a:r>
-            <a:endParaRPr lang="en-US" sz="1300" dirty="0"/>
+            <a:endParaRPr lang="en-US" sz="4800" dirty="0"/>
           </a:p>
+        </p:txBody>
+      </p:sp>
+      <p:sp>
+        <p:nvSpPr>
+          <p:cNvPr id="3" name="Text 1"/>
+          <p:cNvSpPr/>
+          <p:nvPr/>
+        </p:nvSpPr>
+        <p:spPr>
+          <a:xfrm>
+            <a:off x="548640" y="4297680"/>
+            <a:ext cx="8046720" cy="365760"/>
+          </a:xfrm>
+          <a:prstGeom prst="rect">
+            <a:avLst/>
+          </a:prstGeom>
+          <a:noFill/>
+          <a:ln/>
+        </p:spPr>
+        <p:txBody>
+          <a:bodyPr wrap="square" lIns="0" tIns="0" rIns="0" bIns="0" rtlCol="0" anchor="ctr"/>
+          <a:lstStyle/>
           <a:p>
             <a:pPr algn="ctr" indent="0" marL="0">
               <a:buNone/>
             </a:pPr>
             <a:r>
-              <a:rPr lang="en-US" sz="1300" i="1" dirty="0">
+              <a:rPr lang="en-US" sz="1300" dirty="0">
                 <a:solidFill>
-                  <a:srgbClr val="7C4DBE"/>
+                  <a:srgbClr val="D9CBEF"/>
                 </a:solidFill>
                 <a:latin typeface="Calibri" pitchFamily="34" charset="0"/>
                 <a:ea typeface="Calibri" pitchFamily="34" charset="-122"/>
                 <a:cs typeface="Calibri" pitchFamily="34" charset="-120"/>
               </a:rPr>
-              <a:t>(query → reply → alert → redirect)</a:t>
+              <a:t>Appendix slides follow, clearly labelled</a:t>
             </a:r>
             <a:endParaRPr lang="en-US" sz="1300" dirty="0"/>
           </a:p>
@@ -11093,404 +7569,8 @@
         </p:nvSpPr>
         <p:spPr>
           <a:xfrm>
-            <a:off x="548640" y="292608"/>
-            <a:ext cx="5943600" cy="274320"/>
-          </a:xfrm>
-          <a:prstGeom prst="rect">
-            <a:avLst/>
-          </a:prstGeom>
-          <a:noFill/>
-          <a:ln/>
-        </p:spPr>
-        <p:txBody>
-          <a:bodyPr wrap="square" lIns="0" tIns="0" rIns="0" bIns="0" rtlCol="0" anchor="ctr"/>
-          <a:lstStyle/>
-          <a:p>
-            <a:pPr indent="0" marL="0">
-              <a:buNone/>
-            </a:pPr>
-            <a:r>
-              <a:rPr lang="en-US" sz="1200" b="1" spc="200" kern="0" dirty="0">
-                <a:solidFill>
-                  <a:srgbClr val="7C4DBE"/>
-                </a:solidFill>
-                <a:latin typeface="Calibri" pitchFamily="34" charset="0"/>
-                <a:ea typeface="Calibri" pitchFamily="34" charset="-122"/>
-                <a:cs typeface="Calibri" pitchFamily="34" charset="-120"/>
-              </a:rPr>
-              <a:t>TASK 3</a:t>
-            </a:r>
-            <a:endParaRPr lang="en-US" sz="1200" dirty="0"/>
-          </a:p>
-        </p:txBody>
-      </p:sp>
-      <p:sp>
-        <p:nvSpPr>
-          <p:cNvPr id="3" name="Text 1"/>
-          <p:cNvSpPr/>
-          <p:nvPr/>
-        </p:nvSpPr>
-        <p:spPr>
-          <a:xfrm>
-            <a:off x="548640" y="548640"/>
-            <a:ext cx="8046720" cy="685800"/>
-          </a:xfrm>
-          <a:prstGeom prst="rect">
-            <a:avLst/>
-          </a:prstGeom>
-          <a:noFill/>
-          <a:ln/>
-        </p:spPr>
-        <p:txBody>
-          <a:bodyPr wrap="square" lIns="0" tIns="0" rIns="0" bIns="0" rtlCol="0" anchor="ctr"/>
-          <a:lstStyle/>
-          <a:p>
-            <a:pPr indent="0" marL="0">
-              <a:buNone/>
-            </a:pPr>
-            <a:r>
-              <a:rPr lang="en-US" sz="3000" b="1" dirty="0">
-                <a:solidFill>
-                  <a:srgbClr val="5B2D8E"/>
-                </a:solidFill>
-                <a:latin typeface="Calibri" pitchFamily="34" charset="0"/>
-                <a:ea typeface="Calibri" pitchFamily="34" charset="-122"/>
-                <a:cs typeface="Calibri" pitchFamily="34" charset="-120"/>
-              </a:rPr>
-              <a:t>Delay model</a:t>
-            </a:r>
-            <a:endParaRPr lang="en-US" sz="3000" dirty="0"/>
-          </a:p>
-        </p:txBody>
-      </p:sp>
-      <p:sp>
-        <p:nvSpPr>
-          <p:cNvPr id="4" name="Shape 2"/>
-          <p:cNvSpPr/>
-          <p:nvPr/>
-        </p:nvSpPr>
-        <p:spPr>
-          <a:xfrm>
-            <a:off x="8275320" y="384048"/>
-            <a:ext cx="384048" cy="0"/>
-          </a:xfrm>
-          <a:prstGeom prst="line">
-            <a:avLst/>
-          </a:prstGeom>
-          <a:noFill/>
-          <a:ln w="12700">
-            <a:solidFill>
-              <a:srgbClr val="D9CBEF"/>
-            </a:solidFill>
-            <a:prstDash val="solid"/>
-          </a:ln>
-        </p:spPr>
-      </p:sp>
-      <p:sp>
-        <p:nvSpPr>
-          <p:cNvPr id="5" name="Shape 3"/>
-          <p:cNvSpPr/>
-          <p:nvPr/>
-        </p:nvSpPr>
-        <p:spPr>
-          <a:xfrm>
-            <a:off x="8275320" y="384048"/>
-            <a:ext cx="0" cy="384048"/>
-          </a:xfrm>
-          <a:prstGeom prst="line">
-            <a:avLst/>
-          </a:prstGeom>
-          <a:noFill/>
-          <a:ln w="12700">
-            <a:solidFill>
-              <a:srgbClr val="D9CBEF"/>
-            </a:solidFill>
-            <a:prstDash val="solid"/>
-          </a:ln>
-        </p:spPr>
-      </p:sp>
-      <p:sp>
-        <p:nvSpPr>
-          <p:cNvPr id="6" name="Shape 4"/>
-          <p:cNvSpPr/>
-          <p:nvPr/>
-        </p:nvSpPr>
-        <p:spPr>
-          <a:xfrm>
-            <a:off x="8275320" y="576072"/>
-            <a:ext cx="384048" cy="0"/>
-          </a:xfrm>
-          <a:prstGeom prst="line">
-            <a:avLst/>
-          </a:prstGeom>
-          <a:noFill/>
-          <a:ln w="12700">
-            <a:solidFill>
-              <a:srgbClr val="D9CBEF"/>
-            </a:solidFill>
-            <a:prstDash val="solid"/>
-          </a:ln>
-        </p:spPr>
-      </p:sp>
-      <p:sp>
-        <p:nvSpPr>
-          <p:cNvPr id="7" name="Shape 5"/>
-          <p:cNvSpPr/>
-          <p:nvPr/>
-        </p:nvSpPr>
-        <p:spPr>
-          <a:xfrm>
-            <a:off x="8467344" y="384048"/>
-            <a:ext cx="0" cy="384048"/>
-          </a:xfrm>
-          <a:prstGeom prst="line">
-            <a:avLst/>
-          </a:prstGeom>
-          <a:noFill/>
-          <a:ln w="12700">
-            <a:solidFill>
-              <a:srgbClr val="D9CBEF"/>
-            </a:solidFill>
-            <a:prstDash val="solid"/>
-          </a:ln>
-        </p:spPr>
-      </p:sp>
-      <p:sp>
-        <p:nvSpPr>
-          <p:cNvPr id="8" name="Shape 6"/>
-          <p:cNvSpPr/>
-          <p:nvPr/>
-        </p:nvSpPr>
-        <p:spPr>
-          <a:xfrm>
-            <a:off x="8275320" y="768096"/>
-            <a:ext cx="384048" cy="0"/>
-          </a:xfrm>
-          <a:prstGeom prst="line">
-            <a:avLst/>
-          </a:prstGeom>
-          <a:noFill/>
-          <a:ln w="12700">
-            <a:solidFill>
-              <a:srgbClr val="D9CBEF"/>
-            </a:solidFill>
-            <a:prstDash val="solid"/>
-          </a:ln>
-        </p:spPr>
-      </p:sp>
-      <p:sp>
-        <p:nvSpPr>
-          <p:cNvPr id="9" name="Shape 7"/>
-          <p:cNvSpPr/>
-          <p:nvPr/>
-        </p:nvSpPr>
-        <p:spPr>
-          <a:xfrm>
-            <a:off x="8659368" y="384048"/>
-            <a:ext cx="0" cy="384048"/>
-          </a:xfrm>
-          <a:prstGeom prst="line">
-            <a:avLst/>
-          </a:prstGeom>
-          <a:noFill/>
-          <a:ln w="12700">
-            <a:solidFill>
-              <a:srgbClr val="D9CBEF"/>
-            </a:solidFill>
-            <a:prstDash val="solid"/>
-          </a:ln>
-        </p:spPr>
-      </p:sp>
-      <p:sp>
-        <p:nvSpPr>
-          <p:cNvPr id="10" name="Shape 8"/>
-          <p:cNvSpPr/>
-          <p:nvPr/>
-        </p:nvSpPr>
-        <p:spPr>
-          <a:xfrm>
-            <a:off x="8234172" y="342900"/>
-            <a:ext cx="82296" cy="82296"/>
-          </a:xfrm>
-          <a:prstGeom prst="ellipse">
-            <a:avLst/>
-          </a:prstGeom>
-          <a:solidFill>
-            <a:srgbClr val="7C4DBE"/>
-          </a:solidFill>
-          <a:ln/>
-        </p:spPr>
-      </p:sp>
-      <p:sp>
-        <p:nvSpPr>
-          <p:cNvPr id="11" name="Shape 9"/>
-          <p:cNvSpPr/>
-          <p:nvPr/>
-        </p:nvSpPr>
-        <p:spPr>
-          <a:xfrm>
-            <a:off x="8234172" y="534924"/>
-            <a:ext cx="82296" cy="82296"/>
-          </a:xfrm>
-          <a:prstGeom prst="ellipse">
-            <a:avLst/>
-          </a:prstGeom>
-          <a:solidFill>
-            <a:srgbClr val="7C4DBE"/>
-          </a:solidFill>
-          <a:ln/>
-        </p:spPr>
-      </p:sp>
-      <p:sp>
-        <p:nvSpPr>
-          <p:cNvPr id="12" name="Shape 10"/>
-          <p:cNvSpPr/>
-          <p:nvPr/>
-        </p:nvSpPr>
-        <p:spPr>
-          <a:xfrm>
-            <a:off x="8234172" y="726948"/>
-            <a:ext cx="82296" cy="82296"/>
-          </a:xfrm>
-          <a:prstGeom prst="ellipse">
-            <a:avLst/>
-          </a:prstGeom>
-          <a:solidFill>
-            <a:srgbClr val="7C4DBE"/>
-          </a:solidFill>
-          <a:ln/>
-        </p:spPr>
-      </p:sp>
-      <p:sp>
-        <p:nvSpPr>
-          <p:cNvPr id="13" name="Shape 11"/>
-          <p:cNvSpPr/>
-          <p:nvPr/>
-        </p:nvSpPr>
-        <p:spPr>
-          <a:xfrm>
-            <a:off x="8426196" y="342900"/>
-            <a:ext cx="82296" cy="82296"/>
-          </a:xfrm>
-          <a:prstGeom prst="ellipse">
-            <a:avLst/>
-          </a:prstGeom>
-          <a:solidFill>
-            <a:srgbClr val="7C4DBE"/>
-          </a:solidFill>
-          <a:ln/>
-        </p:spPr>
-      </p:sp>
-      <p:sp>
-        <p:nvSpPr>
-          <p:cNvPr id="14" name="Shape 12"/>
-          <p:cNvSpPr/>
-          <p:nvPr/>
-        </p:nvSpPr>
-        <p:spPr>
-          <a:xfrm>
-            <a:off x="8426196" y="534924"/>
-            <a:ext cx="82296" cy="82296"/>
-          </a:xfrm>
-          <a:prstGeom prst="ellipse">
-            <a:avLst/>
-          </a:prstGeom>
-          <a:solidFill>
-            <a:srgbClr val="5B2D8E"/>
-          </a:solidFill>
-          <a:ln/>
-        </p:spPr>
-      </p:sp>
-      <p:sp>
-        <p:nvSpPr>
-          <p:cNvPr id="15" name="Shape 13"/>
-          <p:cNvSpPr/>
-          <p:nvPr/>
-        </p:nvSpPr>
-        <p:spPr>
-          <a:xfrm>
-            <a:off x="8426196" y="726948"/>
-            <a:ext cx="82296" cy="82296"/>
-          </a:xfrm>
-          <a:prstGeom prst="ellipse">
-            <a:avLst/>
-          </a:prstGeom>
-          <a:solidFill>
-            <a:srgbClr val="7C4DBE"/>
-          </a:solidFill>
-          <a:ln/>
-        </p:spPr>
-      </p:sp>
-      <p:sp>
-        <p:nvSpPr>
-          <p:cNvPr id="16" name="Shape 14"/>
-          <p:cNvSpPr/>
-          <p:nvPr/>
-        </p:nvSpPr>
-        <p:spPr>
-          <a:xfrm>
-            <a:off x="8618220" y="342900"/>
-            <a:ext cx="82296" cy="82296"/>
-          </a:xfrm>
-          <a:prstGeom prst="ellipse">
-            <a:avLst/>
-          </a:prstGeom>
-          <a:solidFill>
-            <a:srgbClr val="7C4DBE"/>
-          </a:solidFill>
-          <a:ln/>
-        </p:spPr>
-      </p:sp>
-      <p:sp>
-        <p:nvSpPr>
-          <p:cNvPr id="17" name="Shape 15"/>
-          <p:cNvSpPr/>
-          <p:nvPr/>
-        </p:nvSpPr>
-        <p:spPr>
-          <a:xfrm>
-            <a:off x="8618220" y="534924"/>
-            <a:ext cx="82296" cy="82296"/>
-          </a:xfrm>
-          <a:prstGeom prst="ellipse">
-            <a:avLst/>
-          </a:prstGeom>
-          <a:solidFill>
-            <a:srgbClr val="7C4DBE"/>
-          </a:solidFill>
-          <a:ln/>
-        </p:spPr>
-      </p:sp>
-      <p:sp>
-        <p:nvSpPr>
-          <p:cNvPr id="18" name="Shape 16"/>
-          <p:cNvSpPr/>
-          <p:nvPr/>
-        </p:nvSpPr>
-        <p:spPr>
-          <a:xfrm>
-            <a:off x="8618220" y="726948"/>
-            <a:ext cx="82296" cy="82296"/>
-          </a:xfrm>
-          <a:prstGeom prst="ellipse">
-            <a:avLst/>
-          </a:prstGeom>
-          <a:solidFill>
-            <a:srgbClr val="7C4DBE"/>
-          </a:solidFill>
-          <a:ln/>
-        </p:spPr>
-      </p:sp>
-      <p:sp>
-        <p:nvSpPr>
-          <p:cNvPr id="19" name="Text 17"/>
-          <p:cNvSpPr/>
-          <p:nvPr/>
-        </p:nvSpPr>
-        <p:spPr>
-          <a:xfrm>
-            <a:off x="548640" y="1554480"/>
-            <a:ext cx="8046720" cy="822960"/>
+            <a:off x="548640" y="2194560"/>
+            <a:ext cx="8046720" cy="731520"/>
           </a:xfrm>
           <a:prstGeom prst="rect">
             <a:avLst/>
@@ -11506,163 +7586,7 @@
               <a:buNone/>
             </a:pPr>
             <a:r>
-              <a:rPr lang="en-US" sz="3400" b="1" dirty="0">
-                <a:solidFill>
-                  <a:srgbClr val="5B2D8E"/>
-                </a:solidFill>
-                <a:latin typeface="Calibri" pitchFamily="34" charset="0"/>
-                <a:ea typeface="Calibri" pitchFamily="34" charset="-122"/>
-                <a:cs typeface="Calibri" pitchFamily="34" charset="-120"/>
-              </a:rPr>
-              <a:t>t  =  L / B  +  t_other</a:t>
-            </a:r>
-            <a:endParaRPr lang="en-US" sz="3400" dirty="0"/>
-          </a:p>
-        </p:txBody>
-      </p:sp>
-      <p:sp>
-        <p:nvSpPr>
-          <p:cNvPr id="20" name="Text 18"/>
-          <p:cNvSpPr/>
-          <p:nvPr/>
-        </p:nvSpPr>
-        <p:spPr>
-          <a:xfrm>
-            <a:off x="1828800" y="2743200"/>
-            <a:ext cx="5943600" cy="3108960"/>
-          </a:xfrm>
-          <a:prstGeom prst="rect">
-            <a:avLst/>
-          </a:prstGeom>
-          <a:noFill/>
-          <a:ln/>
-        </p:spPr>
-        <p:txBody>
-          <a:bodyPr wrap="square" lIns="0" tIns="0" rIns="0" bIns="0" rtlCol="0" anchor="t"/>
-          <a:lstStyle/>
-          <a:p>
-            <a:pPr marL="152400" indent="-152400">
-              <a:spcAft>
-                <a:spcPts val="1000"/>
-              </a:spcAft>
-              <a:buSzPct val="100000"/>
-              <a:buChar char="•"/>
-            </a:pPr>
-            <a:r>
-              <a:rPr lang="en-US" sz="1600" dirty="0">
-                <a:solidFill>
-                  <a:srgbClr val="2B2140"/>
-                </a:solidFill>
-                <a:latin typeface="Calibri" pitchFamily="34" charset="0"/>
-                <a:ea typeface="Calibri" pitchFamily="34" charset="-122"/>
-                <a:cs typeface="Calibri" pitchFamily="34" charset="-120"/>
-              </a:rPr>
-              <a:t>L = message bits,  B = 1 Gbps (from the spec)</a:t>
-            </a:r>
-            <a:endParaRPr lang="en-US" sz="1600" dirty="0"/>
-          </a:p>
-          <a:p>
-            <a:pPr marL="152400" indent="-152400">
-              <a:spcAft>
-                <a:spcPts val="1000"/>
-              </a:spcAft>
-              <a:buSzPct val="100000"/>
-              <a:buChar char="•"/>
-            </a:pPr>
-            <a:r>
-              <a:rPr lang="en-US" sz="1600" dirty="0">
-                <a:solidFill>
-                  <a:srgbClr val="2B2140"/>
-                </a:solidFill>
-                <a:latin typeface="Calibri" pitchFamily="34" charset="0"/>
-                <a:ea typeface="Calibri" pitchFamily="34" charset="-122"/>
-                <a:cs typeface="Calibri" pitchFamily="34" charset="-120"/>
-              </a:rPr>
-              <a:t>t_other = queuing + processing + propagation</a:t>
-            </a:r>
-            <a:endParaRPr lang="en-US" sz="1600" dirty="0"/>
-          </a:p>
-          <a:p>
-            <a:pPr marL="152400" indent="-152400">
-              <a:spcAft>
-                <a:spcPts val="1000"/>
-              </a:spcAft>
-              <a:buSzPct val="100000"/>
-              <a:buChar char="•"/>
-            </a:pPr>
-            <a:r>
-              <a:rPr lang="en-US" sz="1600" dirty="0">
-                <a:solidFill>
-                  <a:srgbClr val="2B2140"/>
-                </a:solidFill>
-                <a:latin typeface="Calibri" pitchFamily="34" charset="0"/>
-                <a:ea typeface="Calibri" pitchFamily="34" charset="-122"/>
-                <a:cs typeface="Calibri" pitchFamily="34" charset="-120"/>
-              </a:rPr>
-              <a:t>Convention: 1 MB = 10⁶ bytes,  1 Gbps = 10⁹ bps</a:t>
-            </a:r>
-            <a:endParaRPr lang="en-US" sz="1600" dirty="0"/>
-          </a:p>
-        </p:txBody>
-      </p:sp>
-    </p:spTree>
-  </p:cSld>
-  <p:clrMapOvr>
-    <a:masterClrMapping/>
-  </p:clrMapOvr>
-</p:sld>
-</file>
-
-<file path=ppt/slides/slide9.xml><?xml version="1.0" encoding="utf-8"?>
-<p:sld xmlns:a="http://schemas.openxmlformats.org/drawingml/2006/main" xmlns:r="http://schemas.openxmlformats.org/officeDocument/2006/relationships" xmlns:p="http://schemas.openxmlformats.org/presentationml/2006/main">
-  <p:cSld name="Slide 9">
-    <p:bg>
-      <p:bgPr>
-        <a:solidFill>
-          <a:srgbClr val="FFFFFF"/>
-        </a:solidFill>
-      </p:bgPr>
-    </p:bg>
-    <p:spTree>
-      <p:nvGrpSpPr>
-        <p:cNvPr id="1" name=""/>
-        <p:cNvGrpSpPr/>
-        <p:nvPr/>
-      </p:nvGrpSpPr>
-      <p:grpSpPr>
-        <a:xfrm>
-          <a:off x="0" y="0"/>
-          <a:ext cx="0" cy="0"/>
-          <a:chOff x="0" y="0"/>
-          <a:chExt cx="0" cy="0"/>
-        </a:xfrm>
-      </p:grpSpPr>
-      <p:sp>
-        <p:nvSpPr>
-          <p:cNvPr id="2" name="Text 0"/>
-          <p:cNvSpPr/>
-          <p:nvPr/>
-        </p:nvSpPr>
-        <p:spPr>
-          <a:xfrm>
-            <a:off x="548640" y="292608"/>
-            <a:ext cx="5943600" cy="274320"/>
-          </a:xfrm>
-          <a:prstGeom prst="rect">
-            <a:avLst/>
-          </a:prstGeom>
-          <a:noFill/>
-          <a:ln/>
-        </p:spPr>
-        <p:txBody>
-          <a:bodyPr wrap="square" lIns="0" tIns="0" rIns="0" bIns="0" rtlCol="0" anchor="ctr"/>
-          <a:lstStyle/>
-          <a:p>
-            <a:pPr indent="0" marL="0">
-              <a:buNone/>
-            </a:pPr>
-            <a:r>
-              <a:rPr lang="en-US" sz="1200" b="1" spc="200" kern="0" dirty="0">
+              <a:rPr lang="en-US" sz="3600" b="1" spc="600" kern="0" dirty="0">
                 <a:solidFill>
                   <a:srgbClr val="7C4DBE"/>
                 </a:solidFill>
@@ -11670,9 +7594,9 @@
                 <a:ea typeface="Calibri" pitchFamily="34" charset="-122"/>
                 <a:cs typeface="Calibri" pitchFamily="34" charset="-120"/>
               </a:rPr>
-              <a:t>TASK 3</a:t>
+              <a:t>APPENDIX</a:t>
             </a:r>
-            <a:endParaRPr lang="en-US" sz="1200" dirty="0"/>
+            <a:endParaRPr lang="en-US" sz="3600" dirty="0"/>
           </a:p>
         </p:txBody>
       </p:sp>
@@ -11684,8 +7608,8 @@
         </p:nvSpPr>
         <p:spPr>
           <a:xfrm>
-            <a:off x="548640" y="548640"/>
-            <a:ext cx="8046720" cy="685800"/>
+            <a:off x="548640" y="3017520"/>
+            <a:ext cx="8046720" cy="365760"/>
           </a:xfrm>
           <a:prstGeom prst="rect">
             <a:avLst/>
@@ -11697,451 +7621,24 @@
           <a:bodyPr wrap="square" lIns="0" tIns="0" rIns="0" bIns="0" rtlCol="0" anchor="ctr"/>
           <a:lstStyle/>
           <a:p>
-            <a:pPr indent="0" marL="0">
+            <a:pPr algn="ctr" indent="0" marL="0">
               <a:buNone/>
             </a:pPr>
             <a:r>
-              <a:rPr lang="en-US" sz="3000" b="1" dirty="0">
+              <a:rPr lang="en-US" sz="1400" dirty="0">
                 <a:solidFill>
-                  <a:srgbClr val="5B2D8E"/>
+                  <a:srgbClr val="6B6478"/>
                 </a:solidFill>
                 <a:latin typeface="Calibri" pitchFamily="34" charset="0"/>
                 <a:ea typeface="Calibri" pitchFamily="34" charset="-122"/>
                 <a:cs typeface="Calibri" pitchFamily="34" charset="-120"/>
               </a:rPr>
-              <a:t>Scaling with charging nodes</a:t>
+              <a:t>Extra material: full topology working, delay calculations, code skeleton</a:t>
             </a:r>
-            <a:endParaRPr lang="en-US" sz="3000" dirty="0"/>
+            <a:endParaRPr lang="en-US" sz="1400" dirty="0"/>
           </a:p>
         </p:txBody>
       </p:sp>
-      <p:sp>
-        <p:nvSpPr>
-          <p:cNvPr id="4" name="Shape 2"/>
-          <p:cNvSpPr/>
-          <p:nvPr/>
-        </p:nvSpPr>
-        <p:spPr>
-          <a:xfrm>
-            <a:off x="8275320" y="384048"/>
-            <a:ext cx="384048" cy="0"/>
-          </a:xfrm>
-          <a:prstGeom prst="line">
-            <a:avLst/>
-          </a:prstGeom>
-          <a:noFill/>
-          <a:ln w="12700">
-            <a:solidFill>
-              <a:srgbClr val="D9CBEF"/>
-            </a:solidFill>
-            <a:prstDash val="solid"/>
-          </a:ln>
-        </p:spPr>
-      </p:sp>
-      <p:sp>
-        <p:nvSpPr>
-          <p:cNvPr id="5" name="Shape 3"/>
-          <p:cNvSpPr/>
-          <p:nvPr/>
-        </p:nvSpPr>
-        <p:spPr>
-          <a:xfrm>
-            <a:off x="8275320" y="384048"/>
-            <a:ext cx="0" cy="384048"/>
-          </a:xfrm>
-          <a:prstGeom prst="line">
-            <a:avLst/>
-          </a:prstGeom>
-          <a:noFill/>
-          <a:ln w="12700">
-            <a:solidFill>
-              <a:srgbClr val="D9CBEF"/>
-            </a:solidFill>
-            <a:prstDash val="solid"/>
-          </a:ln>
-        </p:spPr>
-      </p:sp>
-      <p:sp>
-        <p:nvSpPr>
-          <p:cNvPr id="6" name="Shape 4"/>
-          <p:cNvSpPr/>
-          <p:nvPr/>
-        </p:nvSpPr>
-        <p:spPr>
-          <a:xfrm>
-            <a:off x="8275320" y="576072"/>
-            <a:ext cx="384048" cy="0"/>
-          </a:xfrm>
-          <a:prstGeom prst="line">
-            <a:avLst/>
-          </a:prstGeom>
-          <a:noFill/>
-          <a:ln w="12700">
-            <a:solidFill>
-              <a:srgbClr val="D9CBEF"/>
-            </a:solidFill>
-            <a:prstDash val="solid"/>
-          </a:ln>
-        </p:spPr>
-      </p:sp>
-      <p:sp>
-        <p:nvSpPr>
-          <p:cNvPr id="7" name="Shape 5"/>
-          <p:cNvSpPr/>
-          <p:nvPr/>
-        </p:nvSpPr>
-        <p:spPr>
-          <a:xfrm>
-            <a:off x="8467344" y="384048"/>
-            <a:ext cx="0" cy="384048"/>
-          </a:xfrm>
-          <a:prstGeom prst="line">
-            <a:avLst/>
-          </a:prstGeom>
-          <a:noFill/>
-          <a:ln w="12700">
-            <a:solidFill>
-              <a:srgbClr val="D9CBEF"/>
-            </a:solidFill>
-            <a:prstDash val="solid"/>
-          </a:ln>
-        </p:spPr>
-      </p:sp>
-      <p:sp>
-        <p:nvSpPr>
-          <p:cNvPr id="8" name="Shape 6"/>
-          <p:cNvSpPr/>
-          <p:nvPr/>
-        </p:nvSpPr>
-        <p:spPr>
-          <a:xfrm>
-            <a:off x="8275320" y="768096"/>
-            <a:ext cx="384048" cy="0"/>
-          </a:xfrm>
-          <a:prstGeom prst="line">
-            <a:avLst/>
-          </a:prstGeom>
-          <a:noFill/>
-          <a:ln w="12700">
-            <a:solidFill>
-              <a:srgbClr val="D9CBEF"/>
-            </a:solidFill>
-            <a:prstDash val="solid"/>
-          </a:ln>
-        </p:spPr>
-      </p:sp>
-      <p:sp>
-        <p:nvSpPr>
-          <p:cNvPr id="9" name="Shape 7"/>
-          <p:cNvSpPr/>
-          <p:nvPr/>
-        </p:nvSpPr>
-        <p:spPr>
-          <a:xfrm>
-            <a:off x="8659368" y="384048"/>
-            <a:ext cx="0" cy="384048"/>
-          </a:xfrm>
-          <a:prstGeom prst="line">
-            <a:avLst/>
-          </a:prstGeom>
-          <a:noFill/>
-          <a:ln w="12700">
-            <a:solidFill>
-              <a:srgbClr val="D9CBEF"/>
-            </a:solidFill>
-            <a:prstDash val="solid"/>
-          </a:ln>
-        </p:spPr>
-      </p:sp>
-      <p:sp>
-        <p:nvSpPr>
-          <p:cNvPr id="10" name="Shape 8"/>
-          <p:cNvSpPr/>
-          <p:nvPr/>
-        </p:nvSpPr>
-        <p:spPr>
-          <a:xfrm>
-            <a:off x="8234172" y="342900"/>
-            <a:ext cx="82296" cy="82296"/>
-          </a:xfrm>
-          <a:prstGeom prst="ellipse">
-            <a:avLst/>
-          </a:prstGeom>
-          <a:solidFill>
-            <a:srgbClr val="7C4DBE"/>
-          </a:solidFill>
-          <a:ln/>
-        </p:spPr>
-      </p:sp>
-      <p:sp>
-        <p:nvSpPr>
-          <p:cNvPr id="11" name="Shape 9"/>
-          <p:cNvSpPr/>
-          <p:nvPr/>
-        </p:nvSpPr>
-        <p:spPr>
-          <a:xfrm>
-            <a:off x="8234172" y="534924"/>
-            <a:ext cx="82296" cy="82296"/>
-          </a:xfrm>
-          <a:prstGeom prst="ellipse">
-            <a:avLst/>
-          </a:prstGeom>
-          <a:solidFill>
-            <a:srgbClr val="7C4DBE"/>
-          </a:solidFill>
-          <a:ln/>
-        </p:spPr>
-      </p:sp>
-      <p:sp>
-        <p:nvSpPr>
-          <p:cNvPr id="12" name="Shape 10"/>
-          <p:cNvSpPr/>
-          <p:nvPr/>
-        </p:nvSpPr>
-        <p:spPr>
-          <a:xfrm>
-            <a:off x="8234172" y="726948"/>
-            <a:ext cx="82296" cy="82296"/>
-          </a:xfrm>
-          <a:prstGeom prst="ellipse">
-            <a:avLst/>
-          </a:prstGeom>
-          <a:solidFill>
-            <a:srgbClr val="7C4DBE"/>
-          </a:solidFill>
-          <a:ln/>
-        </p:spPr>
-      </p:sp>
-      <p:sp>
-        <p:nvSpPr>
-          <p:cNvPr id="13" name="Shape 11"/>
-          <p:cNvSpPr/>
-          <p:nvPr/>
-        </p:nvSpPr>
-        <p:spPr>
-          <a:xfrm>
-            <a:off x="8426196" y="342900"/>
-            <a:ext cx="82296" cy="82296"/>
-          </a:xfrm>
-          <a:prstGeom prst="ellipse">
-            <a:avLst/>
-          </a:prstGeom>
-          <a:solidFill>
-            <a:srgbClr val="7C4DBE"/>
-          </a:solidFill>
-          <a:ln/>
-        </p:spPr>
-      </p:sp>
-      <p:sp>
-        <p:nvSpPr>
-          <p:cNvPr id="14" name="Shape 12"/>
-          <p:cNvSpPr/>
-          <p:nvPr/>
-        </p:nvSpPr>
-        <p:spPr>
-          <a:xfrm>
-            <a:off x="8426196" y="534924"/>
-            <a:ext cx="82296" cy="82296"/>
-          </a:xfrm>
-          <a:prstGeom prst="ellipse">
-            <a:avLst/>
-          </a:prstGeom>
-          <a:solidFill>
-            <a:srgbClr val="5B2D8E"/>
-          </a:solidFill>
-          <a:ln/>
-        </p:spPr>
-      </p:sp>
-      <p:sp>
-        <p:nvSpPr>
-          <p:cNvPr id="15" name="Shape 13"/>
-          <p:cNvSpPr/>
-          <p:nvPr/>
-        </p:nvSpPr>
-        <p:spPr>
-          <a:xfrm>
-            <a:off x="8426196" y="726948"/>
-            <a:ext cx="82296" cy="82296"/>
-          </a:xfrm>
-          <a:prstGeom prst="ellipse">
-            <a:avLst/>
-          </a:prstGeom>
-          <a:solidFill>
-            <a:srgbClr val="7C4DBE"/>
-          </a:solidFill>
-          <a:ln/>
-        </p:spPr>
-      </p:sp>
-      <p:sp>
-        <p:nvSpPr>
-          <p:cNvPr id="16" name="Shape 14"/>
-          <p:cNvSpPr/>
-          <p:nvPr/>
-        </p:nvSpPr>
-        <p:spPr>
-          <a:xfrm>
-            <a:off x="8618220" y="342900"/>
-            <a:ext cx="82296" cy="82296"/>
-          </a:xfrm>
-          <a:prstGeom prst="ellipse">
-            <a:avLst/>
-          </a:prstGeom>
-          <a:solidFill>
-            <a:srgbClr val="7C4DBE"/>
-          </a:solidFill>
-          <a:ln/>
-        </p:spPr>
-      </p:sp>
-      <p:sp>
-        <p:nvSpPr>
-          <p:cNvPr id="17" name="Shape 15"/>
-          <p:cNvSpPr/>
-          <p:nvPr/>
-        </p:nvSpPr>
-        <p:spPr>
-          <a:xfrm>
-            <a:off x="8618220" y="534924"/>
-            <a:ext cx="82296" cy="82296"/>
-          </a:xfrm>
-          <a:prstGeom prst="ellipse">
-            <a:avLst/>
-          </a:prstGeom>
-          <a:solidFill>
-            <a:srgbClr val="7C4DBE"/>
-          </a:solidFill>
-          <a:ln/>
-        </p:spPr>
-      </p:sp>
-      <p:sp>
-        <p:nvSpPr>
-          <p:cNvPr id="18" name="Shape 16"/>
-          <p:cNvSpPr/>
-          <p:nvPr/>
-        </p:nvSpPr>
-        <p:spPr>
-          <a:xfrm>
-            <a:off x="8618220" y="726948"/>
-            <a:ext cx="82296" cy="82296"/>
-          </a:xfrm>
-          <a:prstGeom prst="ellipse">
-            <a:avLst/>
-          </a:prstGeom>
-          <a:solidFill>
-            <a:srgbClr val="7C4DBE"/>
-          </a:solidFill>
-          <a:ln/>
-        </p:spPr>
-      </p:sp>
-      <p:sp>
-        <p:nvSpPr>
-          <p:cNvPr id="19" name="Text 17"/>
-          <p:cNvSpPr/>
-          <p:nvPr/>
-        </p:nvSpPr>
-        <p:spPr>
-          <a:xfrm>
-            <a:off x="548640" y="1508760"/>
-            <a:ext cx="3383280" cy="3108960"/>
-          </a:xfrm>
-          <a:prstGeom prst="rect">
-            <a:avLst/>
-          </a:prstGeom>
-          <a:noFill/>
-          <a:ln/>
-        </p:spPr>
-        <p:txBody>
-          <a:bodyPr wrap="square" lIns="0" tIns="0" rIns="0" bIns="0" rtlCol="0" anchor="t"/>
-          <a:lstStyle/>
-          <a:p>
-            <a:pPr marL="152400" indent="-152400">
-              <a:spcAft>
-                <a:spcPts val="1000"/>
-              </a:spcAft>
-              <a:buSzPct val="100000"/>
-              <a:buChar char="•"/>
-            </a:pPr>
-            <a:r>
-              <a:rPr lang="en-US" sz="1450" dirty="0">
-                <a:solidFill>
-                  <a:srgbClr val="2B2140"/>
-                </a:solidFill>
-                <a:latin typeface="Calibri" pitchFamily="34" charset="0"/>
-                <a:ea typeface="Calibri" pitchFamily="34" charset="-122"/>
-                <a:cs typeface="Calibri" pitchFamily="34" charset="-120"/>
-              </a:rPr>
-              <a:t>Neighbour messages: degree capped at 4 → O(1)</a:t>
-            </a:r>
-            <a:endParaRPr lang="en-US" sz="1450" dirty="0"/>
-          </a:p>
-          <a:p>
-            <a:pPr marL="152400" indent="-152400">
-              <a:spcAft>
-                <a:spcPts val="1000"/>
-              </a:spcAft>
-              <a:buSzPct val="100000"/>
-              <a:buChar char="•"/>
-            </a:pPr>
-            <a:r>
-              <a:rPr lang="en-US" sz="1450" dirty="0">
-                <a:solidFill>
-                  <a:srgbClr val="2B2140"/>
-                </a:solidFill>
-                <a:latin typeface="Calibri" pitchFamily="34" charset="0"/>
-                <a:ea typeface="Calibri" pitchFamily="34" charset="-122"/>
-                <a:cs typeface="Calibri" pitchFamily="34" charset="-120"/>
-              </a:rPr>
-              <a:t>Alerts: all n nodes share one base-station link → O(n)</a:t>
-            </a:r>
-            <a:endParaRPr lang="en-US" sz="1450" dirty="0"/>
-          </a:p>
-          <a:p>
-            <a:pPr marL="152400" indent="-152400">
-              <a:spcAft>
-                <a:spcPts val="1000"/>
-              </a:spcAft>
-              <a:buSzPct val="100000"/>
-              <a:buChar char="•"/>
-            </a:pPr>
-            <a:r>
-              <a:rPr lang="en-US" sz="1450" dirty="0">
-                <a:solidFill>
-                  <a:srgbClr val="2B2140"/>
-                </a:solidFill>
-                <a:latin typeface="Calibri" pitchFamily="34" charset="0"/>
-                <a:ea typeface="Calibri" pitchFamily="34" charset="-122"/>
-                <a:cs typeface="Calibri" pitchFamily="34" charset="-120"/>
-              </a:rPr>
-              <a:t>Star hub = the scalability limit</a:t>
-            </a:r>
-            <a:endParaRPr lang="en-US" sz="1450" dirty="0"/>
-          </a:p>
-        </p:txBody>
-      </p:sp>
-      <p:pic>
-        <p:nvPicPr>
-          <p:cNvPr id="20" name="Image 0" descr="/Users/erwynasoo/FIT3143/Week6_Applied1/solution/graphs/delay_vs_nodes.png">    </p:cNvPr>
-          <p:cNvPicPr>
-            <a:picLocks noChangeAspect="1"/>
-          </p:cNvPicPr>
-          <p:nvPr/>
-        </p:nvPicPr>
-        <p:blipFill>
-          <a:blip r:embed="rId1"/>
-          <a:stretch>
-            <a:fillRect/>
-          </a:stretch>
-        </p:blipFill>
-        <p:spPr>
-          <a:xfrm>
-            <a:off x="4114800" y="1371600"/>
-            <a:ext cx="4572000" cy="3246120"/>
-          </a:xfrm>
-          <a:prstGeom prst="rect">
-            <a:avLst/>
-          </a:prstGeom>
-        </p:spPr>
-      </p:pic>
     </p:spTree>
   </p:cSld>
   <p:clrMapOvr>
